--- a/template_baku.pptx.pptx
+++ b/template_baku.pptx.pptx
@@ -249,7 +249,7 @@
           <a:p>
             <a:fld id="{E9FF55DB-804C-42BF-85A9-7EC675B140D9}" type="datetimeFigureOut">
               <a:rPr lang="en-US" smtClean="0"/>
-              <a:t>9/24/2026</a:t>
+              <a:t>9/25/2026</a:t>
             </a:fld>
             <a:endParaRPr lang="en-US"/>
           </a:p>
@@ -901,7 +901,7 @@
           <a:p>
             <a:fld id="{5BCAD085-E8A6-8845-BD4E-CB4CCA059FC4}" type="datetimeFigureOut">
               <a:rPr lang="en-US" smtClean="0"/>
-              <a:t>9/24/2026</a:t>
+              <a:t>9/25/2026</a:t>
             </a:fld>
             <a:endParaRPr lang="en-US"/>
           </a:p>
@@ -1069,7 +1069,7 @@
           <a:p>
             <a:fld id="{5BCAD085-E8A6-8845-BD4E-CB4CCA059FC4}" type="datetimeFigureOut">
               <a:rPr lang="en-US" smtClean="0"/>
-              <a:t>9/24/2026</a:t>
+              <a:t>9/25/2026</a:t>
             </a:fld>
             <a:endParaRPr lang="en-US"/>
           </a:p>
@@ -1247,7 +1247,7 @@
           <a:p>
             <a:fld id="{5BCAD085-E8A6-8845-BD4E-CB4CCA059FC4}" type="datetimeFigureOut">
               <a:rPr lang="en-US" smtClean="0"/>
-              <a:t>9/24/2026</a:t>
+              <a:t>9/25/2026</a:t>
             </a:fld>
             <a:endParaRPr lang="en-US"/>
           </a:p>
@@ -1356,7 +1356,7 @@
           <a:graphicData uri="http://schemas.openxmlformats.org/presentationml/2006/ole">
             <mc:AlternateContent xmlns:mc="http://schemas.openxmlformats.org/markup-compatibility/2006">
               <mc:Choice xmlns:v="urn:schemas-microsoft-com:vml" Requires="v">
-                <p:oleObj spid="_x0000_s1036" name="think-cell Slide" r:id="rId8" imgW="413" imgH="416" progId="TCLayout.ActiveDocument.1">
+                <p:oleObj spid="_x0000_s1037" name="think-cell Slide" r:id="rId8" imgW="413" imgH="416" progId="TCLayout.ActiveDocument.1">
                   <p:embed/>
                 </p:oleObj>
               </mc:Choice>
@@ -2584,7 +2584,7 @@
           <a:p>
             <a:fld id="{5BCAD085-E8A6-8845-BD4E-CB4CCA059FC4}" type="datetimeFigureOut">
               <a:rPr lang="en-US" smtClean="0"/>
-              <a:t>9/24/2026</a:t>
+              <a:t>9/25/2026</a:t>
             </a:fld>
             <a:endParaRPr lang="en-US"/>
           </a:p>
@@ -2829,7 +2829,7 @@
           <a:p>
             <a:fld id="{5BCAD085-E8A6-8845-BD4E-CB4CCA059FC4}" type="datetimeFigureOut">
               <a:rPr lang="en-US" smtClean="0"/>
-              <a:t>9/24/2026</a:t>
+              <a:t>9/25/2026</a:t>
             </a:fld>
             <a:endParaRPr lang="en-US"/>
           </a:p>
@@ -3114,7 +3114,7 @@
           <a:p>
             <a:fld id="{5BCAD085-E8A6-8845-BD4E-CB4CCA059FC4}" type="datetimeFigureOut">
               <a:rPr lang="en-US" smtClean="0"/>
-              <a:t>9/24/2026</a:t>
+              <a:t>9/25/2026</a:t>
             </a:fld>
             <a:endParaRPr lang="en-US"/>
           </a:p>
@@ -3533,7 +3533,7 @@
           <a:p>
             <a:fld id="{5BCAD085-E8A6-8845-BD4E-CB4CCA059FC4}" type="datetimeFigureOut">
               <a:rPr lang="en-US" smtClean="0"/>
-              <a:t>9/24/2026</a:t>
+              <a:t>9/25/2026</a:t>
             </a:fld>
             <a:endParaRPr lang="en-US"/>
           </a:p>
@@ -3650,7 +3650,7 @@
           <a:p>
             <a:fld id="{5BCAD085-E8A6-8845-BD4E-CB4CCA059FC4}" type="datetimeFigureOut">
               <a:rPr lang="en-US" smtClean="0"/>
-              <a:t>9/24/2026</a:t>
+              <a:t>9/25/2026</a:t>
             </a:fld>
             <a:endParaRPr lang="en-US"/>
           </a:p>
@@ -3745,7 +3745,7 @@
           <a:p>
             <a:fld id="{5BCAD085-E8A6-8845-BD4E-CB4CCA059FC4}" type="datetimeFigureOut">
               <a:rPr lang="en-US" smtClean="0"/>
-              <a:t>9/24/2026</a:t>
+              <a:t>9/25/2026</a:t>
             </a:fld>
             <a:endParaRPr lang="en-US"/>
           </a:p>
@@ -4020,7 +4020,7 @@
           <a:p>
             <a:fld id="{5BCAD085-E8A6-8845-BD4E-CB4CCA059FC4}" type="datetimeFigureOut">
               <a:rPr lang="en-US" smtClean="0"/>
-              <a:t>9/24/2026</a:t>
+              <a:t>9/25/2026</a:t>
             </a:fld>
             <a:endParaRPr lang="en-US"/>
           </a:p>
@@ -4272,7 +4272,7 @@
           <a:p>
             <a:fld id="{5BCAD085-E8A6-8845-BD4E-CB4CCA059FC4}" type="datetimeFigureOut">
               <a:rPr lang="en-US" smtClean="0"/>
-              <a:t>9/24/2026</a:t>
+              <a:t>9/25/2026</a:t>
             </a:fld>
             <a:endParaRPr lang="en-US"/>
           </a:p>
@@ -4483,7 +4483,7 @@
           <a:p>
             <a:fld id="{5BCAD085-E8A6-8845-BD4E-CB4CCA059FC4}" type="datetimeFigureOut">
               <a:rPr lang="en-US" smtClean="0"/>
-              <a:t>9/24/2026</a:t>
+              <a:t>9/25/2026</a:t>
             </a:fld>
             <a:endParaRPr lang="en-US"/>
           </a:p>
@@ -6012,9 +6012,9 @@
         <p:grpSpPr>
           <a:xfrm>
             <a:off x="159970" y="5031042"/>
-            <a:ext cx="11934845" cy="1969255"/>
+            <a:ext cx="11934845" cy="1799978"/>
             <a:chOff x="179420" y="5405554"/>
-            <a:chExt cx="11934845" cy="1969255"/>
+            <a:chExt cx="11934845" cy="1799978"/>
           </a:xfrm>
         </p:grpSpPr>
         <p:sp>
@@ -6179,7 +6179,7 @@
           <p:spPr>
             <a:xfrm>
               <a:off x="239110" y="5682038"/>
-              <a:ext cx="11875155" cy="1692771"/>
+              <a:ext cx="11875155" cy="1523494"/>
             </a:xfrm>
             <a:prstGeom prst="rect">
               <a:avLst/>
@@ -6246,11 +6246,35 @@
               </a:r>
               <a:r>
                 <a:rPr lang="en-US" sz="1100" dirty="0"/>
-                <a:t> </a:t>
+                <a:t> {{</a:t>
               </a:r>
               <a:r>
                 <a:rPr lang="en-US" sz="1100" dirty="0" err="1"/>
-                <a:t>Gempa</a:t>
+                <a:t>jenis_kejadian</a:t>
+              </a:r>
+              <a:r>
+                <a:rPr lang="en-US" sz="1100" dirty="0"/>
+                <a:t>}}|{{</a:t>
+              </a:r>
+              <a:r>
+                <a:rPr lang="en-US" sz="1100" dirty="0" err="1"/>
+                <a:t>detail_kejadian</a:t>
+              </a:r>
+              <a:r>
+                <a:rPr lang="en-US" sz="1100" dirty="0"/>
+                <a:t>}} yang </a:t>
+              </a:r>
+              <a:r>
+                <a:rPr lang="en-US" sz="1100" dirty="0" err="1"/>
+                <a:t>terjadi</a:t>
+              </a:r>
+              <a:r>
+                <a:rPr lang="en-US" sz="1100" dirty="0"/>
+                <a:t> pada September 2026 </a:t>
+              </a:r>
+              <a:r>
+                <a:rPr lang="en-US" sz="1100" dirty="0" err="1"/>
+                <a:t>dengan</a:t>
               </a:r>
               <a:r>
                 <a:rPr lang="en-US" sz="1100" dirty="0"/>
@@ -6258,23 +6282,7 @@
               </a:r>
               <a:r>
                 <a:rPr lang="en-US" sz="1100" dirty="0" err="1"/>
-                <a:t>Bumi</a:t>
-              </a:r>
-              <a:r>
-                <a:rPr lang="en-US" sz="1100" dirty="0"/>
-                <a:t> (6.2 Mag) yang </a:t>
-              </a:r>
-              <a:r>
-                <a:rPr lang="en-US" sz="1100" dirty="0" err="1"/>
-                <a:t>terjadi</a:t>
-              </a:r>
-              <a:r>
-                <a:rPr lang="en-US" sz="1100" dirty="0"/>
-                <a:t> pada September 2026 </a:t>
-              </a:r>
-              <a:r>
-                <a:rPr lang="en-US" sz="1100" dirty="0" err="1"/>
-                <a:t>dengan</a:t>
+                <a:t>titik</a:t>
               </a:r>
               <a:r>
                 <a:rPr lang="en-US" sz="1100" dirty="0"/>
@@ -6282,27 +6290,19 @@
               </a:r>
               <a:r>
                 <a:rPr lang="en-US" sz="1100" dirty="0" err="1"/>
-                <a:t>titik</a:t>
+                <a:t>fokus</a:t>
               </a:r>
               <a:r>
                 <a:rPr lang="en-US" sz="1100" dirty="0"/>
-                <a:t> </a:t>
+                <a:t> {{</a:t>
               </a:r>
               <a:r>
                 <a:rPr lang="en-US" sz="1100" dirty="0" err="1"/>
-                <a:t>fokus</a:t>
+                <a:t>lokasi</a:t>
               </a:r>
               <a:r>
                 <a:rPr lang="en-US" sz="1100" dirty="0"/>
-                <a:t> </a:t>
-              </a:r>
-              <a:r>
-                <a:rPr lang="en-US" sz="1100" dirty="0" err="1"/>
-                <a:t>Kabupaten</a:t>
-              </a:r>
-              <a:r>
-                <a:rPr lang="en-US" sz="1100" dirty="0"/>
-                <a:t> PEGUNUNGAN BINTANG, </a:t>
+                <a:t>}}, </a:t>
               </a:r>
               <a:r>
                 <a:rPr lang="en-US" sz="1100" dirty="0" err="1"/>
@@ -10842,11 +10842,35 @@
             </a:r>
             <a:r>
               <a:rPr lang="en-US" sz="1100" dirty="0"/>
-              <a:t> </a:t>
+              <a:t> {{</a:t>
             </a:r>
             <a:r>
               <a:rPr lang="en-US" sz="1100" dirty="0" err="1"/>
-              <a:t>Gempa</a:t>
+              <a:t>jenis_kejadian</a:t>
+            </a:r>
+            <a:r>
+              <a:rPr lang="en-US" sz="1100" dirty="0"/>
+              <a:t>}}|{{</a:t>
+            </a:r>
+            <a:r>
+              <a:rPr lang="en-US" sz="1100" dirty="0" err="1"/>
+              <a:t>detail_kejadian</a:t>
+            </a:r>
+            <a:r>
+              <a:rPr lang="en-US" sz="1100" dirty="0"/>
+              <a:t>}} yang </a:t>
+            </a:r>
+            <a:r>
+              <a:rPr lang="en-US" sz="1100" dirty="0" err="1"/>
+              <a:t>terjadi</a:t>
+            </a:r>
+            <a:r>
+              <a:rPr lang="en-US" sz="1100" dirty="0"/>
+              <a:t> pada September 2026 </a:t>
+            </a:r>
+            <a:r>
+              <a:rPr lang="en-US" sz="1100" dirty="0" err="1"/>
+              <a:t>dengan</a:t>
             </a:r>
             <a:r>
               <a:rPr lang="en-US" sz="1100" dirty="0"/>
@@ -10854,23 +10878,7 @@
             </a:r>
             <a:r>
               <a:rPr lang="en-US" sz="1100" dirty="0" err="1"/>
-              <a:t>Bumi</a:t>
-            </a:r>
-            <a:r>
-              <a:rPr lang="en-US" sz="1100" dirty="0"/>
-              <a:t> (6.2 Mag) yang </a:t>
-            </a:r>
-            <a:r>
-              <a:rPr lang="en-US" sz="1100" dirty="0" err="1"/>
-              <a:t>terjadi</a:t>
-            </a:r>
-            <a:r>
-              <a:rPr lang="en-US" sz="1100" dirty="0"/>
-              <a:t> pada September 2026 </a:t>
-            </a:r>
-            <a:r>
-              <a:rPr lang="en-US" sz="1100" dirty="0" err="1"/>
-              <a:t>dengan</a:t>
+              <a:t>titik</a:t>
             </a:r>
             <a:r>
               <a:rPr lang="en-US" sz="1100" dirty="0"/>
@@ -10878,27 +10886,19 @@
             </a:r>
             <a:r>
               <a:rPr lang="en-US" sz="1100" dirty="0" err="1"/>
-              <a:t>titik</a:t>
+              <a:t>fokus</a:t>
             </a:r>
             <a:r>
               <a:rPr lang="en-US" sz="1100" dirty="0"/>
-              <a:t> </a:t>
+              <a:t> {{</a:t>
             </a:r>
             <a:r>
               <a:rPr lang="en-US" sz="1100" dirty="0" err="1"/>
-              <a:t>fokus</a:t>
+              <a:t>lokasi</a:t>
             </a:r>
             <a:r>
               <a:rPr lang="en-US" sz="1100" dirty="0"/>
-              <a:t> </a:t>
-            </a:r>
-            <a:r>
-              <a:rPr lang="en-US" sz="1100" dirty="0" err="1"/>
-              <a:t>Kabupaten</a:t>
-            </a:r>
-            <a:r>
-              <a:rPr lang="en-US" sz="1100" dirty="0"/>
-              <a:t> PEGUNUNGAN BINTANG, </a:t>
+              <a:t>}}, </a:t>
             </a:r>
             <a:r>
               <a:rPr lang="en-US" sz="1100" dirty="0" err="1"/>

--- a/template_baku.pptx.pptx
+++ b/template_baku.pptx.pptx
@@ -1356,7 +1356,7 @@
           <a:graphicData uri="http://schemas.openxmlformats.org/presentationml/2006/ole">
             <mc:AlternateContent xmlns:mc="http://schemas.openxmlformats.org/markup-compatibility/2006">
               <mc:Choice xmlns:v="urn:schemas-microsoft-com:vml" Requires="v">
-                <p:oleObj spid="_x0000_s1037" name="think-cell Slide" r:id="rId8" imgW="413" imgH="416" progId="TCLayout.ActiveDocument.1">
+                <p:oleObj spid="_x0000_s1038" name="think-cell Slide" r:id="rId8" imgW="413" imgH="416" progId="TCLayout.ActiveDocument.1">
                   <p:embed/>
                 </p:oleObj>
               </mc:Choice>
@@ -6253,8 +6253,8 @@
                 <a:t>jenis_kejadian</a:t>
               </a:r>
               <a:r>
-                <a:rPr lang="en-US" sz="1100" dirty="0"/>
-                <a:t>}}|{{</a:t>
+                <a:rPr lang="en-US" sz="1100"/>
+                <a:t>}} {{</a:t>
               </a:r>
               <a:r>
                 <a:rPr lang="en-US" sz="1100" dirty="0" err="1"/>

--- a/template_baku.pptx.pptx
+++ b/template_baku.pptx.pptx
@@ -16,41 +16,41 @@
   <p:notesSz cx="6858000" cy="9144000"/>
   <p:embeddedFontLst>
     <p:embeddedFont>
-      <p:font typeface="Yu Gothic" panose="020B0400000000000000" pitchFamily="34" charset="-128"/>
+      <p:font typeface="Barlow" panose="00000500000000000000" pitchFamily="2" charset="0"/>
       <p:regular r:id="rId6"/>
       <p:bold r:id="rId7"/>
-    </p:embeddedFont>
-    <p:embeddedFont>
-      <p:font typeface="Barlow" panose="00000500000000000000" pitchFamily="2" charset="0"/>
-      <p:regular r:id="rId8"/>
-      <p:bold r:id="rId9"/>
-      <p:italic r:id="rId10"/>
-      <p:boldItalic r:id="rId11"/>
+      <p:italic r:id="rId8"/>
+      <p:boldItalic r:id="rId9"/>
     </p:embeddedFont>
     <p:embeddedFont>
       <p:font typeface="Calibri" panose="020F0502020204030204" pitchFamily="34" charset="0"/>
-      <p:regular r:id="rId12"/>
-      <p:bold r:id="rId13"/>
-      <p:italic r:id="rId14"/>
-      <p:boldItalic r:id="rId15"/>
+      <p:regular r:id="rId10"/>
+      <p:bold r:id="rId11"/>
+      <p:italic r:id="rId12"/>
+      <p:boldItalic r:id="rId13"/>
     </p:embeddedFont>
     <p:embeddedFont>
       <p:font typeface="Montserrat" panose="00000500000000000000" pitchFamily="2" charset="0"/>
-      <p:regular r:id="rId16"/>
-      <p:bold r:id="rId17"/>
-      <p:italic r:id="rId18"/>
-      <p:boldItalic r:id="rId19"/>
+      <p:regular r:id="rId14"/>
+      <p:bold r:id="rId15"/>
+      <p:italic r:id="rId16"/>
+      <p:boldItalic r:id="rId17"/>
     </p:embeddedFont>
     <p:embeddedFont>
       <p:font typeface="Plus Jakarta Sans"/>
-      <p:italic r:id="rId20"/>
+      <p:italic r:id="rId18"/>
     </p:embeddedFont>
     <p:embeddedFont>
       <p:font typeface="Segoe UI" panose="020B0502040204020203" pitchFamily="34" charset="0"/>
-      <p:regular r:id="rId21"/>
-      <p:bold r:id="rId22"/>
-      <p:italic r:id="rId23"/>
-      <p:boldItalic r:id="rId24"/>
+      <p:regular r:id="rId19"/>
+      <p:bold r:id="rId20"/>
+      <p:italic r:id="rId21"/>
+      <p:boldItalic r:id="rId22"/>
+    </p:embeddedFont>
+    <p:embeddedFont>
+      <p:font typeface="Yu Gothic" panose="020B0400000000000000" pitchFamily="34" charset="-128"/>
+      <p:regular r:id="rId23"/>
+      <p:bold r:id="rId24"/>
     </p:embeddedFont>
   </p:embeddedFontLst>
   <p:defaultTextStyle>
@@ -249,7 +249,7 @@
           <a:p>
             <a:fld id="{E9FF55DB-804C-42BF-85A9-7EC675B140D9}" type="datetimeFigureOut">
               <a:rPr lang="en-US" smtClean="0"/>
-              <a:t>9/25/2026</a:t>
+              <a:t>10/4/2026</a:t>
             </a:fld>
             <a:endParaRPr lang="en-US"/>
           </a:p>
@@ -901,7 +901,7 @@
           <a:p>
             <a:fld id="{5BCAD085-E8A6-8845-BD4E-CB4CCA059FC4}" type="datetimeFigureOut">
               <a:rPr lang="en-US" smtClean="0"/>
-              <a:t>9/25/2026</a:t>
+              <a:t>10/4/2026</a:t>
             </a:fld>
             <a:endParaRPr lang="en-US"/>
           </a:p>
@@ -1069,7 +1069,7 @@
           <a:p>
             <a:fld id="{5BCAD085-E8A6-8845-BD4E-CB4CCA059FC4}" type="datetimeFigureOut">
               <a:rPr lang="en-US" smtClean="0"/>
-              <a:t>9/25/2026</a:t>
+              <a:t>10/4/2026</a:t>
             </a:fld>
             <a:endParaRPr lang="en-US"/>
           </a:p>
@@ -1247,7 +1247,7 @@
           <a:p>
             <a:fld id="{5BCAD085-E8A6-8845-BD4E-CB4CCA059FC4}" type="datetimeFigureOut">
               <a:rPr lang="en-US" smtClean="0"/>
-              <a:t>9/25/2026</a:t>
+              <a:t>10/4/2026</a:t>
             </a:fld>
             <a:endParaRPr lang="en-US"/>
           </a:p>
@@ -1356,7 +1356,7 @@
           <a:graphicData uri="http://schemas.openxmlformats.org/presentationml/2006/ole">
             <mc:AlternateContent xmlns:mc="http://schemas.openxmlformats.org/markup-compatibility/2006">
               <mc:Choice xmlns:v="urn:schemas-microsoft-com:vml" Requires="v">
-                <p:oleObj spid="_x0000_s1038" name="think-cell Slide" r:id="rId8" imgW="413" imgH="416" progId="TCLayout.ActiveDocument.1">
+                <p:oleObj spid="_x0000_s1041" name="think-cell Slide" r:id="rId8" imgW="413" imgH="416" progId="TCLayout.ActiveDocument.1">
                   <p:embed/>
                 </p:oleObj>
               </mc:Choice>
@@ -2584,7 +2584,7 @@
           <a:p>
             <a:fld id="{5BCAD085-E8A6-8845-BD4E-CB4CCA059FC4}" type="datetimeFigureOut">
               <a:rPr lang="en-US" smtClean="0"/>
-              <a:t>9/25/2026</a:t>
+              <a:t>10/4/2026</a:t>
             </a:fld>
             <a:endParaRPr lang="en-US"/>
           </a:p>
@@ -2829,7 +2829,7 @@
           <a:p>
             <a:fld id="{5BCAD085-E8A6-8845-BD4E-CB4CCA059FC4}" type="datetimeFigureOut">
               <a:rPr lang="en-US" smtClean="0"/>
-              <a:t>9/25/2026</a:t>
+              <a:t>10/4/2026</a:t>
             </a:fld>
             <a:endParaRPr lang="en-US"/>
           </a:p>
@@ -3114,7 +3114,7 @@
           <a:p>
             <a:fld id="{5BCAD085-E8A6-8845-BD4E-CB4CCA059FC4}" type="datetimeFigureOut">
               <a:rPr lang="en-US" smtClean="0"/>
-              <a:t>9/25/2026</a:t>
+              <a:t>10/4/2026</a:t>
             </a:fld>
             <a:endParaRPr lang="en-US"/>
           </a:p>
@@ -3533,7 +3533,7 @@
           <a:p>
             <a:fld id="{5BCAD085-E8A6-8845-BD4E-CB4CCA059FC4}" type="datetimeFigureOut">
               <a:rPr lang="en-US" smtClean="0"/>
-              <a:t>9/25/2026</a:t>
+              <a:t>10/4/2026</a:t>
             </a:fld>
             <a:endParaRPr lang="en-US"/>
           </a:p>
@@ -3650,7 +3650,7 @@
           <a:p>
             <a:fld id="{5BCAD085-E8A6-8845-BD4E-CB4CCA059FC4}" type="datetimeFigureOut">
               <a:rPr lang="en-US" smtClean="0"/>
-              <a:t>9/25/2026</a:t>
+              <a:t>10/4/2026</a:t>
             </a:fld>
             <a:endParaRPr lang="en-US"/>
           </a:p>
@@ -3745,7 +3745,7 @@
           <a:p>
             <a:fld id="{5BCAD085-E8A6-8845-BD4E-CB4CCA059FC4}" type="datetimeFigureOut">
               <a:rPr lang="en-US" smtClean="0"/>
-              <a:t>9/25/2026</a:t>
+              <a:t>10/4/2026</a:t>
             </a:fld>
             <a:endParaRPr lang="en-US"/>
           </a:p>
@@ -4020,7 +4020,7 @@
           <a:p>
             <a:fld id="{5BCAD085-E8A6-8845-BD4E-CB4CCA059FC4}" type="datetimeFigureOut">
               <a:rPr lang="en-US" smtClean="0"/>
-              <a:t>9/25/2026</a:t>
+              <a:t>10/4/2026</a:t>
             </a:fld>
             <a:endParaRPr lang="en-US"/>
           </a:p>
@@ -4272,7 +4272,7 @@
           <a:p>
             <a:fld id="{5BCAD085-E8A6-8845-BD4E-CB4CCA059FC4}" type="datetimeFigureOut">
               <a:rPr lang="en-US" smtClean="0"/>
-              <a:t>9/25/2026</a:t>
+              <a:t>10/4/2026</a:t>
             </a:fld>
             <a:endParaRPr lang="en-US"/>
           </a:p>
@@ -4483,7 +4483,7 @@
           <a:p>
             <a:fld id="{5BCAD085-E8A6-8845-BD4E-CB4CCA059FC4}" type="datetimeFigureOut">
               <a:rPr lang="en-US" smtClean="0"/>
-              <a:t>9/25/2026</a:t>
+              <a:t>10/4/2026</a:t>
             </a:fld>
             <a:endParaRPr lang="en-US"/>
           </a:p>
@@ -5867,6 +5867,116 @@
       </p:grpSpPr>
       <p:sp>
         <p:nvSpPr>
+          <p:cNvPr id="94" name="Rounded Rectangle 8">
+            <a:extLst>
+              <a:ext uri="{FF2B5EF4-FFF2-40B4-BE49-F238E27FC236}">
+                <a16:creationId xmlns:a16="http://schemas.microsoft.com/office/drawing/2014/main" id="{6DD3E83F-A788-4634-A759-1D18E2BA596A}"/>
+              </a:ext>
+            </a:extLst>
+          </p:cNvPr>
+          <p:cNvSpPr/>
+          <p:nvPr/>
+        </p:nvSpPr>
+        <p:spPr>
+          <a:xfrm>
+            <a:off x="8886031" y="3310611"/>
+            <a:ext cx="3257538" cy="800345"/>
+          </a:xfrm>
+          <a:prstGeom prst="roundRect">
+            <a:avLst>
+              <a:gd name="adj" fmla="val 7792"/>
+            </a:avLst>
+          </a:prstGeom>
+          <a:solidFill>
+            <a:srgbClr val="FFFFFF"/>
+          </a:solidFill>
+          <a:ln w="9525">
+            <a:solidFill>
+              <a:srgbClr val="E2E8F0"/>
+            </a:solidFill>
+          </a:ln>
+          <a:effectLst/>
+        </p:spPr>
+        <p:style>
+          <a:lnRef idx="1">
+            <a:schemeClr val="accent1"/>
+          </a:lnRef>
+          <a:fillRef idx="3">
+            <a:schemeClr val="accent1"/>
+          </a:fillRef>
+          <a:effectRef idx="2">
+            <a:schemeClr val="accent1"/>
+          </a:effectRef>
+          <a:fontRef idx="minor">
+            <a:schemeClr val="lt1"/>
+          </a:fontRef>
+        </p:style>
+        <p:txBody>
+          <a:bodyPr rtlCol="0" anchor="ctr"/>
+          <a:lstStyle/>
+          <a:p>
+            <a:pPr algn="ctr"/>
+            <a:endParaRPr/>
+          </a:p>
+        </p:txBody>
+      </p:sp>
+      <p:sp>
+        <p:nvSpPr>
+          <p:cNvPr id="93" name="Rounded Rectangle 8">
+            <a:extLst>
+              <a:ext uri="{FF2B5EF4-FFF2-40B4-BE49-F238E27FC236}">
+                <a16:creationId xmlns:a16="http://schemas.microsoft.com/office/drawing/2014/main" id="{0F637161-64B2-4834-B9D4-0F2AE556769A}"/>
+              </a:ext>
+            </a:extLst>
+          </p:cNvPr>
+          <p:cNvSpPr/>
+          <p:nvPr/>
+        </p:nvSpPr>
+        <p:spPr>
+          <a:xfrm>
+            <a:off x="5567155" y="3319250"/>
+            <a:ext cx="3257538" cy="800345"/>
+          </a:xfrm>
+          <a:prstGeom prst="roundRect">
+            <a:avLst>
+              <a:gd name="adj" fmla="val 7792"/>
+            </a:avLst>
+          </a:prstGeom>
+          <a:solidFill>
+            <a:srgbClr val="FFFFFF"/>
+          </a:solidFill>
+          <a:ln w="9525">
+            <a:solidFill>
+              <a:srgbClr val="E2E8F0"/>
+            </a:solidFill>
+          </a:ln>
+          <a:effectLst/>
+        </p:spPr>
+        <p:style>
+          <a:lnRef idx="1">
+            <a:schemeClr val="accent1"/>
+          </a:lnRef>
+          <a:fillRef idx="3">
+            <a:schemeClr val="accent1"/>
+          </a:fillRef>
+          <a:effectRef idx="2">
+            <a:schemeClr val="accent1"/>
+          </a:effectRef>
+          <a:fontRef idx="minor">
+            <a:schemeClr val="lt1"/>
+          </a:fontRef>
+        </p:style>
+        <p:txBody>
+          <a:bodyPr rtlCol="0" anchor="ctr"/>
+          <a:lstStyle/>
+          <a:p>
+            <a:pPr algn="ctr"/>
+            <a:endParaRPr dirty="0"/>
+          </a:p>
+        </p:txBody>
+      </p:sp>
+      <p:sp>
+        <p:nvSpPr>
           <p:cNvPr id="17" name="Title 1">
             <a:extLst>
               <a:ext uri="{FF2B5EF4-FFF2-40B4-BE49-F238E27FC236}">
@@ -5919,7 +6029,7 @@
         <p:grpSpPr>
           <a:xfrm>
             <a:off x="102567" y="666886"/>
-            <a:ext cx="5392608" cy="4312224"/>
+            <a:ext cx="5392608" cy="4514438"/>
             <a:chOff x="179422" y="692319"/>
             <a:chExt cx="5291304" cy="4247710"/>
           </a:xfrm>
@@ -6011,10 +6121,10 @@
         </p:nvGrpSpPr>
         <p:grpSpPr>
           <a:xfrm>
-            <a:off x="159970" y="5031042"/>
-            <a:ext cx="11934845" cy="1799978"/>
+            <a:off x="159970" y="5246143"/>
+            <a:ext cx="11934845" cy="1584878"/>
             <a:chOff x="179420" y="5405554"/>
-            <a:chExt cx="11934845" cy="1799978"/>
+            <a:chExt cx="11934845" cy="1799977"/>
           </a:xfrm>
         </p:grpSpPr>
         <p:sp>
@@ -6179,7 +6289,7 @@
           <p:spPr>
             <a:xfrm>
               <a:off x="239110" y="5682038"/>
-              <a:ext cx="11875155" cy="1523494"/>
+              <a:ext cx="11875155" cy="1523493"/>
             </a:xfrm>
             <a:prstGeom prst="rect">
               <a:avLst/>
@@ -6253,7 +6363,7 @@
                 <a:t>jenis_kejadian</a:t>
               </a:r>
               <a:r>
-                <a:rPr lang="en-US" sz="1100"/>
+                <a:rPr lang="en-US" sz="1100" dirty="0"/>
                 <a:t>}} {{</a:t>
               </a:r>
               <a:r>
@@ -7246,7 +7356,7 @@
           <a:p>
             <a:pPr algn="l"/>
             <a:r>
-              <a:rPr sz="1350" b="1" i="0" u="none">
+              <a:rPr sz="1350" b="1" i="0" u="none" dirty="0">
                 <a:solidFill>
                   <a:srgbClr val="0F172A"/>
                 </a:solidFill>
@@ -8626,7 +8736,7 @@
         <p:spPr>
           <a:xfrm>
             <a:off x="8886031" y="1913837"/>
-            <a:ext cx="3257538" cy="1356828"/>
+            <a:ext cx="3257538" cy="1356403"/>
           </a:xfrm>
           <a:prstGeom prst="roundRect">
             <a:avLst>
@@ -9211,8 +9321,8 @@
         </p:nvGrpSpPr>
         <p:grpSpPr>
           <a:xfrm>
-            <a:off x="5598362" y="3863258"/>
-            <a:ext cx="6545207" cy="1104266"/>
+            <a:off x="5572986" y="4367799"/>
+            <a:ext cx="6545207" cy="911882"/>
             <a:chOff x="5547668" y="4328378"/>
             <a:chExt cx="6810741" cy="1104266"/>
           </a:xfrm>
@@ -9829,7 +9939,7 @@
         </p:nvSpPr>
         <p:spPr>
           <a:xfrm>
-            <a:off x="5578461" y="3528616"/>
+            <a:off x="5671047" y="4166788"/>
             <a:ext cx="3653757" cy="215444"/>
           </a:xfrm>
           <a:prstGeom prst="rect">
@@ -9943,49 +10053,6 @@
           </a:p>
         </p:txBody>
       </p:sp>
-      <p:pic>
-        <p:nvPicPr>
-          <p:cNvPr id="195" name="Graphic 194" descr="Children with solid fill">
-            <a:extLst>
-              <a:ext uri="{FF2B5EF4-FFF2-40B4-BE49-F238E27FC236}">
-                <a16:creationId xmlns:a16="http://schemas.microsoft.com/office/drawing/2014/main" id="{324E5F3C-0C3C-457A-9849-9978B921725B}"/>
-              </a:ext>
-            </a:extLst>
-          </p:cNvPr>
-          <p:cNvPicPr>
-            <a:picLocks noChangeAspect="1"/>
-          </p:cNvPicPr>
-          <p:nvPr/>
-        </p:nvPicPr>
-        <p:blipFill>
-          <a:blip r:embed="rId8">
-            <a:extLst>
-              <a:ext uri="{96DAC541-7B7A-43D3-8B79-37D633B846F1}">
-                <asvg:svgBlip xmlns:asvg="http://schemas.microsoft.com/office/drawing/2016/SVG/main" r:embed="rId9"/>
-              </a:ext>
-            </a:extLst>
-          </a:blip>
-          <a:stretch>
-            <a:fillRect/>
-          </a:stretch>
-        </p:blipFill>
-        <p:spPr>
-          <a:xfrm>
-            <a:off x="9232218" y="3217034"/>
-            <a:ext cx="794090" cy="794090"/>
-          </a:xfrm>
-          <a:prstGeom prst="rect">
-            <a:avLst/>
-          </a:prstGeom>
-          <a:effectLst>
-            <a:outerShdw blurRad="50800" dist="38100" dir="2700000" algn="tl" rotWithShape="0">
-              <a:prstClr val="black">
-                <a:alpha val="40000"/>
-              </a:prstClr>
-            </a:outerShdw>
-          </a:effectLst>
-        </p:spPr>
-      </p:pic>
       <p:sp>
         <p:nvSpPr>
           <p:cNvPr id="27" name="TextBox 26">
@@ -10416,6 +10483,307 @@
               </a:solidFill>
               <a:latin typeface="Plus Jakarta Sans"/>
             </a:endParaRPr>
+          </a:p>
+        </p:txBody>
+      </p:sp>
+      <p:sp>
+        <p:nvSpPr>
+          <p:cNvPr id="88" name="TextBox 87">
+            <a:extLst>
+              <a:ext uri="{FF2B5EF4-FFF2-40B4-BE49-F238E27FC236}">
+                <a16:creationId xmlns:a16="http://schemas.microsoft.com/office/drawing/2014/main" id="{13715ECD-57A2-4EE6-BE71-D001A3FCD52C}"/>
+              </a:ext>
+            </a:extLst>
+          </p:cNvPr>
+          <p:cNvSpPr txBox="1"/>
+          <p:nvPr/>
+        </p:nvSpPr>
+        <p:spPr>
+          <a:xfrm>
+            <a:off x="9182731" y="3366750"/>
+            <a:ext cx="824969" cy="207749"/>
+          </a:xfrm>
+          <a:prstGeom prst="rect">
+            <a:avLst/>
+          </a:prstGeom>
+          <a:noFill/>
+        </p:spPr>
+        <p:txBody>
+          <a:bodyPr wrap="none" lIns="0" tIns="0" rIns="0" bIns="0" anchor="t">
+            <a:spAutoFit/>
+          </a:bodyPr>
+          <a:lstStyle/>
+          <a:p>
+            <a:pPr algn="l"/>
+            <a:r>
+              <a:rPr lang="en-US" sz="1350" b="1" dirty="0" err="1">
+                <a:solidFill>
+                  <a:srgbClr val="0F172A"/>
+                </a:solidFill>
+                <a:latin typeface="Plus Jakarta Sans"/>
+              </a:rPr>
+              <a:t>Jenis</a:t>
+            </a:r>
+            <a:r>
+              <a:rPr lang="en-US" sz="1350" b="1" i="0" u="none" dirty="0">
+                <a:solidFill>
+                  <a:srgbClr val="0F172A"/>
+                </a:solidFill>
+                <a:latin typeface="Plus Jakarta Sans"/>
+              </a:rPr>
+              <a:t> Tower</a:t>
+            </a:r>
+            <a:endParaRPr sz="1350" b="1" i="0" u="none" dirty="0">
+              <a:solidFill>
+                <a:srgbClr val="0F172A"/>
+              </a:solidFill>
+              <a:latin typeface="Plus Jakarta Sans"/>
+            </a:endParaRPr>
+          </a:p>
+        </p:txBody>
+      </p:sp>
+      <p:grpSp>
+        <p:nvGrpSpPr>
+          <p:cNvPr id="8" name="Group 7">
+            <a:extLst>
+              <a:ext uri="{FF2B5EF4-FFF2-40B4-BE49-F238E27FC236}">
+                <a16:creationId xmlns:a16="http://schemas.microsoft.com/office/drawing/2014/main" id="{07A81C20-4BD9-4274-8D8E-1684D82255A6}"/>
+              </a:ext>
+            </a:extLst>
+          </p:cNvPr>
+          <p:cNvGrpSpPr/>
+          <p:nvPr/>
+        </p:nvGrpSpPr>
+        <p:grpSpPr>
+          <a:xfrm>
+            <a:off x="5493936" y="3330438"/>
+            <a:ext cx="1188690" cy="369332"/>
+            <a:chOff x="5493936" y="3330438"/>
+            <a:chExt cx="1188690" cy="369332"/>
+          </a:xfrm>
+        </p:grpSpPr>
+        <p:sp>
+          <p:nvSpPr>
+            <p:cNvPr id="85" name="TextBox 84">
+              <a:extLst>
+                <a:ext uri="{FF2B5EF4-FFF2-40B4-BE49-F238E27FC236}">
+                  <a16:creationId xmlns:a16="http://schemas.microsoft.com/office/drawing/2014/main" id="{1A7E4262-E396-4237-A097-6AE2E15C49C9}"/>
+                </a:ext>
+              </a:extLst>
+            </p:cNvPr>
+            <p:cNvSpPr txBox="1"/>
+            <p:nvPr/>
+          </p:nvSpPr>
+          <p:spPr>
+            <a:xfrm>
+              <a:off x="5839125" y="3389451"/>
+              <a:ext cx="843501" cy="207749"/>
+            </a:xfrm>
+            <a:prstGeom prst="rect">
+              <a:avLst/>
+            </a:prstGeom>
+            <a:noFill/>
+          </p:spPr>
+          <p:txBody>
+            <a:bodyPr wrap="none" lIns="0" tIns="0" rIns="0" bIns="0" anchor="t">
+              <a:spAutoFit/>
+            </a:bodyPr>
+            <a:lstStyle/>
+            <a:p>
+              <a:pPr algn="l"/>
+              <a:r>
+                <a:rPr lang="en-US" sz="1350" b="1" dirty="0" err="1">
+                  <a:solidFill>
+                    <a:srgbClr val="0F172A"/>
+                  </a:solidFill>
+                  <a:latin typeface="Plus Jakarta Sans"/>
+                </a:rPr>
+                <a:t>Jenis</a:t>
+              </a:r>
+              <a:r>
+                <a:rPr lang="en-US" sz="1350" b="1" i="0" u="none" dirty="0">
+                  <a:solidFill>
+                    <a:srgbClr val="0F172A"/>
+                  </a:solidFill>
+                  <a:latin typeface="Plus Jakarta Sans"/>
+                </a:rPr>
+                <a:t> Power</a:t>
+              </a:r>
+              <a:endParaRPr sz="1350" b="1" i="0" u="none" dirty="0">
+                <a:solidFill>
+                  <a:srgbClr val="0F172A"/>
+                </a:solidFill>
+                <a:latin typeface="Plus Jakarta Sans"/>
+              </a:endParaRPr>
+            </a:p>
+          </p:txBody>
+        </p:sp>
+        <p:sp>
+          <p:nvSpPr>
+            <p:cNvPr id="89" name="TextBox 88">
+              <a:extLst>
+                <a:ext uri="{FF2B5EF4-FFF2-40B4-BE49-F238E27FC236}">
+                  <a16:creationId xmlns:a16="http://schemas.microsoft.com/office/drawing/2014/main" id="{801A815C-9F7F-4432-BB75-F5CDFDB91647}"/>
+                </a:ext>
+              </a:extLst>
+            </p:cNvPr>
+            <p:cNvSpPr txBox="1"/>
+            <p:nvPr/>
+          </p:nvSpPr>
+          <p:spPr>
+            <a:xfrm>
+              <a:off x="5493936" y="3330438"/>
+              <a:ext cx="345990" cy="369332"/>
+            </a:xfrm>
+            <a:prstGeom prst="rect">
+              <a:avLst/>
+            </a:prstGeom>
+            <a:noFill/>
+          </p:spPr>
+          <p:txBody>
+            <a:bodyPr wrap="square">
+              <a:spAutoFit/>
+            </a:bodyPr>
+            <a:lstStyle/>
+            <a:p>
+              <a:r>
+                <a:rPr lang="en-US" dirty="0"/>
+                <a:t>⚡</a:t>
+              </a:r>
+            </a:p>
+          </p:txBody>
+        </p:sp>
+      </p:grpSp>
+      <p:sp>
+        <p:nvSpPr>
+          <p:cNvPr id="91" name="TextBox 90">
+            <a:extLst>
+              <a:ext uri="{FF2B5EF4-FFF2-40B4-BE49-F238E27FC236}">
+                <a16:creationId xmlns:a16="http://schemas.microsoft.com/office/drawing/2014/main" id="{EE8C5971-EB5C-42B3-9AB6-5750A3CB1A64}"/>
+              </a:ext>
+            </a:extLst>
+          </p:cNvPr>
+          <p:cNvSpPr txBox="1"/>
+          <p:nvPr/>
+        </p:nvSpPr>
+        <p:spPr>
+          <a:xfrm>
+            <a:off x="8821472" y="3282625"/>
+            <a:ext cx="466435" cy="369332"/>
+          </a:xfrm>
+          <a:prstGeom prst="rect">
+            <a:avLst/>
+          </a:prstGeom>
+          <a:noFill/>
+        </p:spPr>
+        <p:txBody>
+          <a:bodyPr wrap="square">
+            <a:spAutoFit/>
+          </a:bodyPr>
+          <a:lstStyle/>
+          <a:p>
+            <a:r>
+              <a:rPr lang="en-US" dirty="0"/>
+              <a:t>🗼</a:t>
+            </a:r>
+          </a:p>
+        </p:txBody>
+      </p:sp>
+      <p:sp>
+        <p:nvSpPr>
+          <p:cNvPr id="9" name="TextBox 8">
+            <a:extLst>
+              <a:ext uri="{FF2B5EF4-FFF2-40B4-BE49-F238E27FC236}">
+                <a16:creationId xmlns:a16="http://schemas.microsoft.com/office/drawing/2014/main" id="{6A906F31-07D7-40EF-A7E3-5198659A1C4A}"/>
+              </a:ext>
+            </a:extLst>
+          </p:cNvPr>
+          <p:cNvSpPr txBox="1"/>
+          <p:nvPr/>
+        </p:nvSpPr>
+        <p:spPr>
+          <a:xfrm>
+            <a:off x="5644827" y="3623957"/>
+            <a:ext cx="3087137" cy="276999"/>
+          </a:xfrm>
+          <a:prstGeom prst="rect">
+            <a:avLst/>
+          </a:prstGeom>
+          <a:noFill/>
+        </p:spPr>
+        <p:txBody>
+          <a:bodyPr wrap="square" rtlCol="0">
+            <a:spAutoFit/>
+          </a:bodyPr>
+          <a:lstStyle/>
+          <a:p>
+            <a:r>
+              <a:rPr lang="en-US" sz="1200" dirty="0">
+                <a:latin typeface="+mj-lt"/>
+              </a:rPr>
+              <a:t>{{</a:t>
+            </a:r>
+            <a:r>
+              <a:rPr lang="en-US" sz="1200" dirty="0" err="1">
+                <a:latin typeface="+mj-lt"/>
+              </a:rPr>
+              <a:t>tipe_power</a:t>
+            </a:r>
+            <a:r>
+              <a:rPr lang="en-US" sz="1200" dirty="0">
+                <a:latin typeface="+mj-lt"/>
+              </a:rPr>
+              <a:t>}}</a:t>
+            </a:r>
+          </a:p>
+        </p:txBody>
+      </p:sp>
+      <p:sp>
+        <p:nvSpPr>
+          <p:cNvPr id="98" name="TextBox 97">
+            <a:extLst>
+              <a:ext uri="{FF2B5EF4-FFF2-40B4-BE49-F238E27FC236}">
+                <a16:creationId xmlns:a16="http://schemas.microsoft.com/office/drawing/2014/main" id="{9ECCD00A-6E5C-489E-917F-A40BADF3BFF7}"/>
+              </a:ext>
+            </a:extLst>
+          </p:cNvPr>
+          <p:cNvSpPr txBox="1"/>
+          <p:nvPr/>
+        </p:nvSpPr>
+        <p:spPr>
+          <a:xfrm>
+            <a:off x="8896740" y="3605286"/>
+            <a:ext cx="3182270" cy="276999"/>
+          </a:xfrm>
+          <a:prstGeom prst="rect">
+            <a:avLst/>
+          </a:prstGeom>
+          <a:noFill/>
+        </p:spPr>
+        <p:txBody>
+          <a:bodyPr wrap="square" rtlCol="0">
+            <a:spAutoFit/>
+          </a:bodyPr>
+          <a:lstStyle/>
+          <a:p>
+            <a:r>
+              <a:rPr lang="en-US" sz="1200" dirty="0">
+                <a:latin typeface="+mj-lt"/>
+              </a:rPr>
+              <a:t>{{</a:t>
+            </a:r>
+            <a:r>
+              <a:rPr lang="en-US" sz="1200" dirty="0" err="1">
+                <a:latin typeface="+mj-lt"/>
+              </a:rPr>
+              <a:t>tipe_tower</a:t>
+            </a:r>
+            <a:r>
+              <a:rPr lang="en-US" sz="1200" dirty="0">
+                <a:latin typeface="+mj-lt"/>
+              </a:rPr>
+              <a:t>}}</a:t>
+            </a:r>
           </a:p>
         </p:txBody>
       </p:sp>

--- a/template_baku.pptx.pptx
+++ b/template_baku.pptx.pptx
@@ -5,52 +5,53 @@
     <p:sldMasterId id="2147483648" r:id="rId1"/>
   </p:sldMasterIdLst>
   <p:notesMasterIdLst>
-    <p:notesMasterId r:id="rId5"/>
+    <p:notesMasterId r:id="rId6"/>
   </p:notesMasterIdLst>
   <p:sldIdLst>
     <p:sldId id="259" r:id="rId2"/>
     <p:sldId id="2147474856" r:id="rId3"/>
     <p:sldId id="2147474857" r:id="rId4"/>
+    <p:sldId id="2147474858" r:id="rId5"/>
   </p:sldIdLst>
   <p:sldSz cx="12192000" cy="6858000"/>
   <p:notesSz cx="6858000" cy="9144000"/>
   <p:embeddedFontLst>
     <p:embeddedFont>
+      <p:font typeface="Yu Gothic" panose="020B0400000000000000" pitchFamily="34" charset="-128"/>
+      <p:regular r:id="rId7"/>
+      <p:bold r:id="rId8"/>
+    </p:embeddedFont>
+    <p:embeddedFont>
       <p:font typeface="Barlow" panose="00000500000000000000" pitchFamily="2" charset="0"/>
-      <p:regular r:id="rId6"/>
-      <p:bold r:id="rId7"/>
-      <p:italic r:id="rId8"/>
-      <p:boldItalic r:id="rId9"/>
+      <p:regular r:id="rId9"/>
+      <p:bold r:id="rId10"/>
+      <p:italic r:id="rId11"/>
+      <p:boldItalic r:id="rId12"/>
     </p:embeddedFont>
     <p:embeddedFont>
       <p:font typeface="Calibri" panose="020F0502020204030204" pitchFamily="34" charset="0"/>
-      <p:regular r:id="rId10"/>
-      <p:bold r:id="rId11"/>
-      <p:italic r:id="rId12"/>
-      <p:boldItalic r:id="rId13"/>
+      <p:regular r:id="rId13"/>
+      <p:bold r:id="rId14"/>
+      <p:italic r:id="rId15"/>
+      <p:boldItalic r:id="rId16"/>
     </p:embeddedFont>
     <p:embeddedFont>
       <p:font typeface="Montserrat" panose="00000500000000000000" pitchFamily="2" charset="0"/>
-      <p:regular r:id="rId14"/>
-      <p:bold r:id="rId15"/>
-      <p:italic r:id="rId16"/>
-      <p:boldItalic r:id="rId17"/>
+      <p:regular r:id="rId17"/>
+      <p:bold r:id="rId18"/>
+      <p:italic r:id="rId19"/>
+      <p:boldItalic r:id="rId20"/>
     </p:embeddedFont>
     <p:embeddedFont>
       <p:font typeface="Plus Jakarta Sans"/>
-      <p:italic r:id="rId18"/>
+      <p:italic r:id="rId21"/>
     </p:embeddedFont>
     <p:embeddedFont>
       <p:font typeface="Segoe UI" panose="020B0502040204020203" pitchFamily="34" charset="0"/>
-      <p:regular r:id="rId19"/>
-      <p:bold r:id="rId20"/>
-      <p:italic r:id="rId21"/>
-      <p:boldItalic r:id="rId22"/>
-    </p:embeddedFont>
-    <p:embeddedFont>
-      <p:font typeface="Yu Gothic" panose="020B0400000000000000" pitchFamily="34" charset="-128"/>
-      <p:regular r:id="rId23"/>
-      <p:bold r:id="rId24"/>
+      <p:regular r:id="rId22"/>
+      <p:bold r:id="rId23"/>
+      <p:italic r:id="rId24"/>
+      <p:boldItalic r:id="rId25"/>
     </p:embeddedFont>
   </p:embeddedFontLst>
   <p:defaultTextStyle>
@@ -249,7 +250,7 @@
           <a:p>
             <a:fld id="{E9FF55DB-804C-42BF-85A9-7EC675B140D9}" type="datetimeFigureOut">
               <a:rPr lang="en-US" smtClean="0"/>
-              <a:t>10/7/2026</a:t>
+              <a:t>10/8/2026</a:t>
             </a:fld>
             <a:endParaRPr lang="en-US"/>
           </a:p>
@@ -722,6 +723,121 @@
 </p:notes>
 </file>
 
+<file path=ppt/notesSlides/notesSlide3.xml><?xml version="1.0" encoding="utf-8"?>
+<p:notes xmlns:a="http://schemas.openxmlformats.org/drawingml/2006/main" xmlns:r="http://schemas.openxmlformats.org/officeDocument/2006/relationships" xmlns:p="http://schemas.openxmlformats.org/presentationml/2006/main">
+  <p:cSld>
+    <p:spTree>
+      <p:nvGrpSpPr>
+        <p:cNvPr id="1" name="">
+          <a:extLst>
+            <a:ext uri="{FF2B5EF4-FFF2-40B4-BE49-F238E27FC236}">
+              <a16:creationId xmlns:a16="http://schemas.microsoft.com/office/drawing/2014/main" id="{A26EC0FD-4BB5-06CC-0293-CF279713A99D}"/>
+            </a:ext>
+          </a:extLst>
+        </p:cNvPr>
+        <p:cNvGrpSpPr/>
+        <p:nvPr/>
+      </p:nvGrpSpPr>
+      <p:grpSpPr>
+        <a:xfrm>
+          <a:off x="0" y="0"/>
+          <a:ext cx="0" cy="0"/>
+          <a:chOff x="0" y="0"/>
+          <a:chExt cx="0" cy="0"/>
+        </a:xfrm>
+      </p:grpSpPr>
+      <p:sp>
+        <p:nvSpPr>
+          <p:cNvPr id="2" name="Slide Image Placeholder 1">
+            <a:extLst>
+              <a:ext uri="{FF2B5EF4-FFF2-40B4-BE49-F238E27FC236}">
+                <a16:creationId xmlns:a16="http://schemas.microsoft.com/office/drawing/2014/main" id="{B89A2798-79D9-D646-320F-EED39F1EAE56}"/>
+              </a:ext>
+            </a:extLst>
+          </p:cNvPr>
+          <p:cNvSpPr>
+            <a:spLocks noGrp="1" noRot="1" noChangeAspect="1"/>
+          </p:cNvSpPr>
+          <p:nvPr>
+            <p:ph type="sldImg"/>
+          </p:nvPr>
+        </p:nvSpPr>
+        <p:spPr/>
+        <p:txBody>
+          <a:bodyPr/>
+          <a:lstStyle/>
+          <a:p>
+            <a:endParaRPr lang="en-US"/>
+          </a:p>
+        </p:txBody>
+      </p:sp>
+      <p:sp>
+        <p:nvSpPr>
+          <p:cNvPr id="3" name="Notes Placeholder 2">
+            <a:extLst>
+              <a:ext uri="{FF2B5EF4-FFF2-40B4-BE49-F238E27FC236}">
+                <a16:creationId xmlns:a16="http://schemas.microsoft.com/office/drawing/2014/main" id="{C95D40EC-A4B0-8A26-8C74-60EBC13AD0E1}"/>
+              </a:ext>
+            </a:extLst>
+          </p:cNvPr>
+          <p:cNvSpPr>
+            <a:spLocks noGrp="1"/>
+          </p:cNvSpPr>
+          <p:nvPr>
+            <p:ph type="body" idx="1"/>
+          </p:nvPr>
+        </p:nvSpPr>
+        <p:spPr/>
+        <p:txBody>
+          <a:bodyPr/>
+          <a:lstStyle/>
+          <a:p>
+            <a:endParaRPr lang="en-US" dirty="0"/>
+          </a:p>
+        </p:txBody>
+      </p:sp>
+      <p:sp>
+        <p:nvSpPr>
+          <p:cNvPr id="4" name="Slide Number Placeholder 3">
+            <a:extLst>
+              <a:ext uri="{FF2B5EF4-FFF2-40B4-BE49-F238E27FC236}">
+                <a16:creationId xmlns:a16="http://schemas.microsoft.com/office/drawing/2014/main" id="{A8934812-5D33-A184-3F06-7F572324FA80}"/>
+              </a:ext>
+            </a:extLst>
+          </p:cNvPr>
+          <p:cNvSpPr>
+            <a:spLocks noGrp="1"/>
+          </p:cNvSpPr>
+          <p:nvPr>
+            <p:ph type="sldNum" sz="quarter" idx="5"/>
+          </p:nvPr>
+        </p:nvSpPr>
+        <p:spPr/>
+        <p:txBody>
+          <a:bodyPr/>
+          <a:lstStyle/>
+          <a:p>
+            <a:fld id="{474B21B5-83D5-434D-BA74-C93E08F55769}" type="slidenum">
+              <a:rPr lang="en-ID" smtClean="0"/>
+              <a:t>4</a:t>
+            </a:fld>
+            <a:endParaRPr lang="en-ID"/>
+          </a:p>
+        </p:txBody>
+      </p:sp>
+    </p:spTree>
+    <p:extLst>
+      <p:ext uri="{BB962C8B-B14F-4D97-AF65-F5344CB8AC3E}">
+        <p14:creationId xmlns:p14="http://schemas.microsoft.com/office/powerpoint/2010/main" val="4058880659"/>
+      </p:ext>
+    </p:extLst>
+  </p:cSld>
+  <p:clrMapOvr>
+    <a:masterClrMapping/>
+  </p:clrMapOvr>
+</p:notes>
+</file>
+
 <file path=ppt/slideLayouts/slideLayout1.xml><?xml version="1.0" encoding="utf-8"?>
 <p:sldLayout xmlns:a="http://schemas.openxmlformats.org/drawingml/2006/main" xmlns:r="http://schemas.openxmlformats.org/officeDocument/2006/relationships" xmlns:p="http://schemas.openxmlformats.org/presentationml/2006/main" type="title" preserve="1">
   <p:cSld name="Title Slide">
@@ -901,7 +1017,7 @@
           <a:p>
             <a:fld id="{5BCAD085-E8A6-8845-BD4E-CB4CCA059FC4}" type="datetimeFigureOut">
               <a:rPr lang="en-US" smtClean="0"/>
-              <a:t>10/7/2026</a:t>
+              <a:t>10/8/2026</a:t>
             </a:fld>
             <a:endParaRPr lang="en-US"/>
           </a:p>
@@ -1069,7 +1185,7 @@
           <a:p>
             <a:fld id="{5BCAD085-E8A6-8845-BD4E-CB4CCA059FC4}" type="datetimeFigureOut">
               <a:rPr lang="en-US" smtClean="0"/>
-              <a:t>10/7/2026</a:t>
+              <a:t>10/8/2026</a:t>
             </a:fld>
             <a:endParaRPr lang="en-US"/>
           </a:p>
@@ -1247,7 +1363,7 @@
           <a:p>
             <a:fld id="{5BCAD085-E8A6-8845-BD4E-CB4CCA059FC4}" type="datetimeFigureOut">
               <a:rPr lang="en-US" smtClean="0"/>
-              <a:t>10/7/2026</a:t>
+              <a:t>10/8/2026</a:t>
             </a:fld>
             <a:endParaRPr lang="en-US"/>
           </a:p>
@@ -1356,7 +1472,7 @@
           <a:graphicData uri="http://schemas.openxmlformats.org/presentationml/2006/ole">
             <mc:AlternateContent xmlns:mc="http://schemas.openxmlformats.org/markup-compatibility/2006">
               <mc:Choice xmlns:v="urn:schemas-microsoft-com:vml" Requires="v">
-                <p:oleObj spid="_x0000_s1060" name="think-cell Slide" r:id="rId8" imgW="413" imgH="416" progId="TCLayout.ActiveDocument.1">
+                <p:oleObj spid="_x0000_s1069" name="think-cell Slide" r:id="rId8" imgW="413" imgH="416" progId="TCLayout.ActiveDocument.1">
                   <p:embed/>
                 </p:oleObj>
               </mc:Choice>
@@ -2584,7 +2700,7 @@
           <a:p>
             <a:fld id="{5BCAD085-E8A6-8845-BD4E-CB4CCA059FC4}" type="datetimeFigureOut">
               <a:rPr lang="en-US" smtClean="0"/>
-              <a:t>10/7/2026</a:t>
+              <a:t>10/8/2026</a:t>
             </a:fld>
             <a:endParaRPr lang="en-US"/>
           </a:p>
@@ -2829,7 +2945,7 @@
           <a:p>
             <a:fld id="{5BCAD085-E8A6-8845-BD4E-CB4CCA059FC4}" type="datetimeFigureOut">
               <a:rPr lang="en-US" smtClean="0"/>
-              <a:t>10/7/2026</a:t>
+              <a:t>10/8/2026</a:t>
             </a:fld>
             <a:endParaRPr lang="en-US"/>
           </a:p>
@@ -3114,7 +3230,7 @@
           <a:p>
             <a:fld id="{5BCAD085-E8A6-8845-BD4E-CB4CCA059FC4}" type="datetimeFigureOut">
               <a:rPr lang="en-US" smtClean="0"/>
-              <a:t>10/7/2026</a:t>
+              <a:t>10/8/2026</a:t>
             </a:fld>
             <a:endParaRPr lang="en-US"/>
           </a:p>
@@ -3533,7 +3649,7 @@
           <a:p>
             <a:fld id="{5BCAD085-E8A6-8845-BD4E-CB4CCA059FC4}" type="datetimeFigureOut">
               <a:rPr lang="en-US" smtClean="0"/>
-              <a:t>10/7/2026</a:t>
+              <a:t>10/8/2026</a:t>
             </a:fld>
             <a:endParaRPr lang="en-US"/>
           </a:p>
@@ -3650,7 +3766,7 @@
           <a:p>
             <a:fld id="{5BCAD085-E8A6-8845-BD4E-CB4CCA059FC4}" type="datetimeFigureOut">
               <a:rPr lang="en-US" smtClean="0"/>
-              <a:t>10/7/2026</a:t>
+              <a:t>10/8/2026</a:t>
             </a:fld>
             <a:endParaRPr lang="en-US"/>
           </a:p>
@@ -3745,7 +3861,7 @@
           <a:p>
             <a:fld id="{5BCAD085-E8A6-8845-BD4E-CB4CCA059FC4}" type="datetimeFigureOut">
               <a:rPr lang="en-US" smtClean="0"/>
-              <a:t>10/7/2026</a:t>
+              <a:t>10/8/2026</a:t>
             </a:fld>
             <a:endParaRPr lang="en-US"/>
           </a:p>
@@ -4020,7 +4136,7 @@
           <a:p>
             <a:fld id="{5BCAD085-E8A6-8845-BD4E-CB4CCA059FC4}" type="datetimeFigureOut">
               <a:rPr lang="en-US" smtClean="0"/>
-              <a:t>10/7/2026</a:t>
+              <a:t>10/8/2026</a:t>
             </a:fld>
             <a:endParaRPr lang="en-US"/>
           </a:p>
@@ -4272,7 +4388,7 @@
           <a:p>
             <a:fld id="{5BCAD085-E8A6-8845-BD4E-CB4CCA059FC4}" type="datetimeFigureOut">
               <a:rPr lang="en-US" smtClean="0"/>
-              <a:t>10/7/2026</a:t>
+              <a:t>10/8/2026</a:t>
             </a:fld>
             <a:endParaRPr lang="en-US"/>
           </a:p>
@@ -4483,7 +4599,7 @@
           <a:p>
             <a:fld id="{5BCAD085-E8A6-8845-BD4E-CB4CCA059FC4}" type="datetimeFigureOut">
               <a:rPr lang="en-US" smtClean="0"/>
-              <a:t>10/7/2026</a:t>
+              <a:t>10/8/2026</a:t>
             </a:fld>
             <a:endParaRPr lang="en-US"/>
           </a:p>
@@ -5123,8 +5239,8 @@
         </p:nvSpPr>
         <p:spPr>
           <a:xfrm>
-            <a:off x="6991350" y="1459359"/>
-            <a:ext cx="4306820" cy="3493905"/>
+            <a:off x="6991349" y="1038622"/>
+            <a:ext cx="4491943" cy="3455433"/>
           </a:xfrm>
           <a:prstGeom prst="rect">
             <a:avLst/>
@@ -5141,12 +5257,49 @@
                 <a:spcPts val="4484"/>
               </a:lnSpc>
             </a:pPr>
-            <a:endParaRPr lang="en-US" sz="3200" b="1" i="0" u="none" dirty="0">
-              <a:solidFill>
-                <a:srgbClr val="009999"/>
-              </a:solidFill>
-              <a:latin typeface="+mj-lt"/>
-            </a:endParaRPr>
+            <a:r>
+              <a:rPr lang="en-US" sz="3200" b="1" i="0" u="none" dirty="0">
+                <a:solidFill>
+                  <a:srgbClr val="009999"/>
+                </a:solidFill>
+                <a:latin typeface="+mj-lt"/>
+              </a:rPr>
+              <a:t>FLASH PERFORMANCE REPORT INFRASTRUKTUR BTS BAKTI</a:t>
+            </a:r>
+          </a:p>
+          <a:p>
+            <a:pPr>
+              <a:lnSpc>
+                <a:spcPts val="4484"/>
+              </a:lnSpc>
+            </a:pPr>
+            <a:r>
+              <a:rPr lang="en-US" sz="3200" b="1" dirty="0">
+                <a:solidFill>
+                  <a:srgbClr val="009999"/>
+                </a:solidFill>
+                <a:latin typeface="+mj-lt"/>
+              </a:rPr>
+              <a:t>{{</a:t>
+            </a:r>
+            <a:r>
+              <a:rPr lang="en-US" sz="3200" b="1" dirty="0" err="1">
+                <a:solidFill>
+                  <a:srgbClr val="009999"/>
+                </a:solidFill>
+                <a:latin typeface="+mj-lt"/>
+              </a:rPr>
+              <a:t>lokasi</a:t>
+            </a:r>
+            <a:r>
+              <a:rPr lang="en-US" sz="3200" b="1" dirty="0">
+                <a:solidFill>
+                  <a:srgbClr val="009999"/>
+                </a:solidFill>
+                <a:latin typeface="+mj-lt"/>
+              </a:rPr>
+              <a:t>}}</a:t>
+            </a:r>
           </a:p>
           <a:p>
             <a:pPr algn="l">
@@ -5154,31 +5307,11 @@
                 <a:spcPts val="4484"/>
               </a:lnSpc>
             </a:pPr>
-            <a:r>
-              <a:rPr lang="en-US" sz="3200" b="1" i="0" u="none" dirty="0">
-                <a:solidFill>
-                  <a:srgbClr val="009999"/>
-                </a:solidFill>
-                <a:latin typeface="+mj-lt"/>
-              </a:rPr>
-              <a:t>FLASH PERFORMANCE REPORT INFRASTRUKTUR BTS BAKTI</a:t>
-            </a:r>
-          </a:p>
-          <a:p>
-            <a:pPr>
-              <a:lnSpc>
-                <a:spcPts val="4840"/>
-              </a:lnSpc>
-              <a:spcBef>
-                <a:spcPct val="0"/>
-              </a:spcBef>
-            </a:pPr>
-            <a:endParaRPr lang="en-US" sz="3200" b="1" dirty="0">
+            <a:endParaRPr lang="en-US" sz="3200" b="1" i="0" u="none" dirty="0">
               <a:solidFill>
                 <a:srgbClr val="009999"/>
               </a:solidFill>
               <a:latin typeface="+mj-lt"/>
-              <a:sym typeface="Arial Nova Bold"/>
             </a:endParaRPr>
           </a:p>
           <a:p>
@@ -5479,7 +5612,7 @@
         <p:spPr>
           <a:xfrm>
             <a:off x="6991349" y="5344978"/>
-            <a:ext cx="2374048" cy="519373"/>
+            <a:ext cx="2456955" cy="530915"/>
           </a:xfrm>
           <a:prstGeom prst="rect">
             <a:avLst/>
@@ -5563,7 +5696,7 @@
           <a:p>
             <a:pPr algn="l"/>
             <a:r>
-              <a:rPr lang="en-US" sz="1125" b="0" i="1" u="none" dirty="0">
+              <a:rPr lang="en-US" sz="1125" i="1" dirty="0">
                 <a:solidFill>
                   <a:schemeClr val="bg1">
                     <a:lumMod val="50000"/>
@@ -5574,7 +5707,7 @@
               <a:t>Query </a:t>
             </a:r>
             <a:r>
-              <a:rPr sz="1125" b="0" i="1" u="none" dirty="0">
+              <a:rPr sz="1125" i="1" dirty="0">
                 <a:solidFill>
                   <a:schemeClr val="bg1">
                     <a:lumMod val="50000"/>
@@ -5585,7 +5718,7 @@
               <a:t>Data </a:t>
             </a:r>
             <a:r>
-              <a:rPr lang="en-US" sz="1125" i="1" dirty="0">
+              <a:rPr lang="en-US" sz="1125" i="1" dirty="0" err="1">
                 <a:solidFill>
                   <a:schemeClr val="bg1">
                     <a:lumMod val="50000"/>
@@ -5593,9 +5726,42 @@
                 </a:solidFill>
                 <a:latin typeface="+mj-lt"/>
               </a:rPr>
-              <a:t>BAKTIOSS</a:t>
-            </a:r>
-            <a:endParaRPr sz="1125" b="0" i="1" u="none" dirty="0">
+              <a:t>diambil</a:t>
+            </a:r>
+            <a:r>
+              <a:rPr lang="en-US" sz="1125" i="1" dirty="0">
+                <a:solidFill>
+                  <a:schemeClr val="bg1">
+                    <a:lumMod val="50000"/>
+                  </a:schemeClr>
+                </a:solidFill>
+                <a:latin typeface="+mj-lt"/>
+              </a:rPr>
+              <a:t> : {{</a:t>
+            </a:r>
+            <a:r>
+              <a:rPr lang="en-US" sz="1125" i="1" dirty="0" err="1">
+                <a:solidFill>
+                  <a:schemeClr val="bg1">
+                    <a:lumMod val="50000"/>
+                  </a:schemeClr>
+                </a:solidFill>
+                <a:latin typeface="+mj-lt"/>
+              </a:rPr>
+              <a:t>timestamp_data</a:t>
+            </a:r>
+            <a:r>
+              <a:rPr lang="en-US" sz="1125" i="1" dirty="0">
+                <a:solidFill>
+                  <a:schemeClr val="bg1">
+                    <a:lumMod val="50000"/>
+                  </a:schemeClr>
+                </a:solidFill>
+                <a:latin typeface="+mj-lt"/>
+              </a:rPr>
+              <a:t>}}</a:t>
+            </a:r>
+            <a:endParaRPr sz="1125" i="1" dirty="0">
               <a:solidFill>
                 <a:schemeClr val="bg1">
                   <a:lumMod val="50000"/>
@@ -5764,64 +5930,6 @@
             <a:endParaRPr lang="en-US" sz="1130" dirty="0">
               <a:latin typeface="+mj-lt"/>
             </a:endParaRPr>
-          </a:p>
-        </p:txBody>
-      </p:sp>
-      <p:sp>
-        <p:nvSpPr>
-          <p:cNvPr id="6" name="TextBox 5">
-            <a:extLst>
-              <a:ext uri="{FF2B5EF4-FFF2-40B4-BE49-F238E27FC236}">
-                <a16:creationId xmlns:a16="http://schemas.microsoft.com/office/drawing/2014/main" id="{694D67FC-E856-47B8-9A68-9B7855A5814F}"/>
-              </a:ext>
-            </a:extLst>
-          </p:cNvPr>
-          <p:cNvSpPr txBox="1"/>
-          <p:nvPr/>
-        </p:nvSpPr>
-        <p:spPr>
-          <a:xfrm>
-            <a:off x="6916347" y="3776323"/>
-            <a:ext cx="1729769" cy="584775"/>
-          </a:xfrm>
-          <a:prstGeom prst="rect">
-            <a:avLst/>
-          </a:prstGeom>
-          <a:noFill/>
-        </p:spPr>
-        <p:txBody>
-          <a:bodyPr wrap="none" rtlCol="0">
-            <a:spAutoFit/>
-          </a:bodyPr>
-          <a:lstStyle/>
-          <a:p>
-            <a:r>
-              <a:rPr lang="en-US" sz="3200" b="1" dirty="0">
-                <a:solidFill>
-                  <a:srgbClr val="009999"/>
-                </a:solidFill>
-                <a:latin typeface="+mj-lt"/>
-              </a:rPr>
-              <a:t>{{</a:t>
-            </a:r>
-            <a:r>
-              <a:rPr lang="en-US" sz="3200" b="1" dirty="0" err="1">
-                <a:solidFill>
-                  <a:srgbClr val="009999"/>
-                </a:solidFill>
-                <a:latin typeface="+mj-lt"/>
-              </a:rPr>
-              <a:t>lokasi</a:t>
-            </a:r>
-            <a:r>
-              <a:rPr lang="en-US" sz="3200" b="1" dirty="0">
-                <a:solidFill>
-                  <a:srgbClr val="009999"/>
-                </a:solidFill>
-                <a:latin typeface="+mj-lt"/>
-              </a:rPr>
-              <a:t>}}</a:t>
-            </a:r>
           </a:p>
         </p:txBody>
       </p:sp>
@@ -8230,9 +8338,9 @@
             <p:grpSpPr>
               <a:xfrm>
                 <a:off x="5547668" y="4336366"/>
-                <a:ext cx="2453930" cy="1230366"/>
+                <a:ext cx="2121078" cy="1000125"/>
                 <a:chOff x="5547667" y="4336366"/>
-                <a:chExt cx="4084699" cy="1230366"/>
+                <a:chExt cx="3530649" cy="1000125"/>
               </a:xfrm>
             </p:grpSpPr>
             <p:sp>
@@ -8304,8 +8412,8 @@
               </p:nvSpPr>
               <p:spPr>
                 <a:xfrm>
-                  <a:off x="5766742" y="4555441"/>
-                  <a:ext cx="3865624" cy="171450"/>
+                  <a:off x="5766743" y="4555441"/>
+                  <a:ext cx="3172035" cy="195673"/>
                 </a:xfrm>
                 <a:prstGeom prst="rect">
                   <a:avLst/>
@@ -8313,57 +8421,27 @@
                 <a:noFill/>
               </p:spPr>
               <p:txBody>
-                <a:bodyPr wrap="none" lIns="0" tIns="0" rIns="0" bIns="0" anchor="t">
+                <a:bodyPr wrap="square" lIns="0" tIns="0" rIns="0" bIns="0" anchor="t">
                   <a:spAutoFit/>
                 </a:bodyPr>
                 <a:lstStyle/>
                 <a:p>
-                  <a:pPr algn="l"/>
+                  <a:pPr algn="ctr"/>
                   <a:r>
-                    <a:rPr sz="1050" b="0" i="0" u="none" dirty="0">
+                    <a:rPr lang="en-US" sz="1050" b="0" i="0" u="none" dirty="0">
                       <a:solidFill>
                         <a:srgbClr val="64748B"/>
                       </a:solidFill>
                       <a:latin typeface="Plus Jakarta Sans"/>
                     </a:rPr>
-                    <a:t>Total Traffic </a:t>
+                    <a:t>Rata-rata Availability</a:t>
                   </a:r>
-                  <a:r>
-                    <a:rPr sz="1050" b="0" i="0" u="none" dirty="0" err="1">
-                      <a:solidFill>
-                        <a:srgbClr val="64748B"/>
-                      </a:solidFill>
-                      <a:latin typeface="Plus Jakarta Sans"/>
-                    </a:rPr>
-                    <a:t>Akumulasi</a:t>
-                  </a:r>
-                  <a:r>
-                    <a:rPr sz="1050" b="0" i="0" u="none" dirty="0">
-                      <a:solidFill>
-                        <a:srgbClr val="64748B"/>
-                      </a:solidFill>
-                      <a:latin typeface="Plus Jakarta Sans"/>
-                    </a:rPr>
-                    <a:t> (</a:t>
-                  </a:r>
-                  <a:r>
-                    <a:rPr sz="1050" b="0" i="0" u="none" dirty="0" err="1">
-                      <a:solidFill>
-                        <a:srgbClr val="64748B"/>
-                      </a:solidFill>
-                      <a:latin typeface="Plus Jakarta Sans"/>
-                    </a:rPr>
-                    <a:t>Periode</a:t>
-                  </a:r>
-                  <a:r>
-                    <a:rPr sz="1050" b="0" i="0" u="none" dirty="0">
-                      <a:solidFill>
-                        <a:srgbClr val="64748B"/>
-                      </a:solidFill>
-                      <a:latin typeface="Plus Jakarta Sans"/>
-                    </a:rPr>
-                    <a:t>)</a:t>
-                  </a:r>
+                  <a:endParaRPr sz="1050" b="0" i="0" u="none" dirty="0">
+                    <a:solidFill>
+                      <a:srgbClr val="64748B"/>
+                    </a:solidFill>
+                    <a:latin typeface="Plus Jakarta Sans"/>
+                  </a:endParaRPr>
                 </a:p>
               </p:txBody>
             </p:sp>
@@ -8381,8 +8459,8 @@
               </p:nvSpPr>
               <p:spPr>
                 <a:xfrm>
-                  <a:off x="5599768" y="4784041"/>
-                  <a:ext cx="3478548" cy="782691"/>
+                  <a:off x="5599768" y="4784042"/>
+                  <a:ext cx="3478548" cy="447252"/>
                 </a:xfrm>
                 <a:prstGeom prst="rect">
                   <a:avLst/>
@@ -8397,32 +8475,35 @@
                 <a:p>
                   <a:pPr algn="ctr"/>
                   <a:r>
-                    <a:rPr lang="en-US" sz="2100" b="1" dirty="0">
+                    <a:rPr lang="en-US" sz="2400" b="1" dirty="0">
                       <a:solidFill>
-                        <a:srgbClr val="006666"/>
+                        <a:srgbClr val="009999"/>
                       </a:solidFill>
-                      <a:latin typeface="Plus Jakarta Sans"/>
                     </a:rPr>
                     <a:t>{{</a:t>
                   </a:r>
                   <a:r>
-                    <a:rPr lang="en-US" sz="2100" b="1" dirty="0" err="1">
+                    <a:rPr lang="en-US" sz="2400" b="1" dirty="0" err="1">
                       <a:solidFill>
-                        <a:srgbClr val="006666"/>
+                        <a:srgbClr val="009999"/>
                       </a:solidFill>
-                      <a:latin typeface="Plus Jakarta Sans"/>
                     </a:rPr>
-                    <a:t>total_traffic_gb</a:t>
+                    <a:t>avg_avail</a:t>
                   </a:r>
                   <a:r>
-                    <a:rPr lang="en-US" sz="2100" b="1" dirty="0">
+                    <a:rPr lang="en-US" sz="2400" b="1" dirty="0">
                       <a:solidFill>
-                        <a:srgbClr val="006666"/>
+                        <a:srgbClr val="009999"/>
                       </a:solidFill>
-                      <a:latin typeface="Plus Jakarta Sans"/>
                     </a:rPr>
-                    <a:t>}} GB</a:t>
+                    <a:t>}}</a:t>
                   </a:r>
+                  <a:endParaRPr lang="en-US" sz="2100" b="1" dirty="0">
+                    <a:solidFill>
+                      <a:srgbClr val="009999"/>
+                    </a:solidFill>
+                    <a:latin typeface="Plus Jakarta Sans"/>
+                  </a:endParaRPr>
                 </a:p>
               </p:txBody>
             </p:sp>
@@ -14161,6 +14242,1695 @@
     <p:extLst>
       <p:ext uri="{BB962C8B-B14F-4D97-AF65-F5344CB8AC3E}">
         <p14:creationId xmlns:p14="http://schemas.microsoft.com/office/powerpoint/2010/main" val="4135349336"/>
+      </p:ext>
+    </p:extLst>
+  </p:cSld>
+  <p:clrMapOvr>
+    <a:masterClrMapping/>
+  </p:clrMapOvr>
+  <mc:AlternateContent xmlns:mc="http://schemas.openxmlformats.org/markup-compatibility/2006" xmlns:p15="http://schemas.microsoft.com/office/powerpoint/2012/main">
+    <mc:Choice Requires="p15">
+      <p:transition xmlns:p14="http://schemas.microsoft.com/office/powerpoint/2010/main" spd="slow" p14:dur="1250">
+        <p15:prstTrans prst="pageCurlDouble"/>
+      </p:transition>
+    </mc:Choice>
+    <mc:Fallback xmlns="">
+      <p:transition spd="slow">
+        <p:fade/>
+      </p:transition>
+    </mc:Fallback>
+  </mc:AlternateContent>
+</p:sld>
+</file>
+
+<file path=ppt/slides/slide4.xml><?xml version="1.0" encoding="utf-8"?>
+<p:sld xmlns:a="http://schemas.openxmlformats.org/drawingml/2006/main" xmlns:r="http://schemas.openxmlformats.org/officeDocument/2006/relationships" xmlns:p="http://schemas.openxmlformats.org/presentationml/2006/main">
+  <p:cSld>
+    <p:spTree>
+      <p:nvGrpSpPr>
+        <p:cNvPr id="1" name="">
+          <a:extLst>
+            <a:ext uri="{FF2B5EF4-FFF2-40B4-BE49-F238E27FC236}">
+              <a16:creationId xmlns:a16="http://schemas.microsoft.com/office/drawing/2014/main" id="{79AB06D9-32D5-878A-6CD9-49854D634A84}"/>
+            </a:ext>
+          </a:extLst>
+        </p:cNvPr>
+        <p:cNvGrpSpPr/>
+        <p:nvPr/>
+      </p:nvGrpSpPr>
+      <p:grpSpPr>
+        <a:xfrm>
+          <a:off x="0" y="0"/>
+          <a:ext cx="0" cy="0"/>
+          <a:chOff x="0" y="0"/>
+          <a:chExt cx="0" cy="0"/>
+        </a:xfrm>
+      </p:grpSpPr>
+      <p:sp>
+        <p:nvSpPr>
+          <p:cNvPr id="17" name="Title 1">
+            <a:extLst>
+              <a:ext uri="{FF2B5EF4-FFF2-40B4-BE49-F238E27FC236}">
+                <a16:creationId xmlns:a16="http://schemas.microsoft.com/office/drawing/2014/main" id="{1EBFAA41-9A01-8649-D281-E3CB79245B23}"/>
+              </a:ext>
+            </a:extLst>
+          </p:cNvPr>
+          <p:cNvSpPr>
+            <a:spLocks noGrp="1"/>
+          </p:cNvSpPr>
+          <p:nvPr>
+            <p:ph type="title"/>
+          </p:nvPr>
+        </p:nvSpPr>
+        <p:spPr>
+          <a:xfrm>
+            <a:off x="1255662" y="85794"/>
+            <a:ext cx="10556293" cy="384721"/>
+          </a:xfrm>
+        </p:spPr>
+        <p:txBody>
+          <a:bodyPr/>
+          <a:lstStyle/>
+          <a:p>
+            <a:pPr algn="l"/>
+            <a:r>
+              <a:rPr lang="it-IT" sz="1800" dirty="0">
+                <a:latin typeface="Calibri" panose="020F0502020204030204" pitchFamily="34" charset="0"/>
+                <a:ea typeface="Calibri" panose="020F0502020204030204" pitchFamily="34" charset="0"/>
+                <a:cs typeface="Arial" panose="020B0604020202020204" pitchFamily="34" charset="0"/>
+              </a:rPr>
+              <a:t>Site Status Kabupaten Level</a:t>
+            </a:r>
+            <a:endParaRPr lang="en-ID" dirty="0"/>
+          </a:p>
+        </p:txBody>
+      </p:sp>
+      <p:grpSp>
+        <p:nvGrpSpPr>
+          <p:cNvPr id="2" name="Group 1">
+            <a:extLst>
+              <a:ext uri="{FF2B5EF4-FFF2-40B4-BE49-F238E27FC236}">
+                <a16:creationId xmlns:a16="http://schemas.microsoft.com/office/drawing/2014/main" id="{A91C1E5A-259D-4229-9D29-321D239C38EB}"/>
+              </a:ext>
+            </a:extLst>
+          </p:cNvPr>
+          <p:cNvGrpSpPr/>
+          <p:nvPr/>
+        </p:nvGrpSpPr>
+        <p:grpSpPr>
+          <a:xfrm>
+            <a:off x="7489103" y="611672"/>
+            <a:ext cx="4605713" cy="4913997"/>
+            <a:chOff x="7940641" y="6474982"/>
+            <a:chExt cx="5944472" cy="2655632"/>
+          </a:xfrm>
+        </p:grpSpPr>
+        <p:sp>
+          <p:nvSpPr>
+            <p:cNvPr id="8" name="Rounded Rectangle 2">
+              <a:extLst>
+                <a:ext uri="{FF2B5EF4-FFF2-40B4-BE49-F238E27FC236}">
+                  <a16:creationId xmlns:a16="http://schemas.microsoft.com/office/drawing/2014/main" id="{303ED831-9AE0-4541-A495-423D08BEBDA3}"/>
+                </a:ext>
+              </a:extLst>
+            </p:cNvPr>
+            <p:cNvSpPr/>
+            <p:nvPr/>
+          </p:nvSpPr>
+          <p:spPr>
+            <a:xfrm>
+              <a:off x="7940641" y="6474982"/>
+              <a:ext cx="5944472" cy="2655632"/>
+            </a:xfrm>
+            <a:prstGeom prst="roundRect">
+              <a:avLst>
+                <a:gd name="adj" fmla="val 5970"/>
+              </a:avLst>
+            </a:prstGeom>
+            <a:solidFill>
+              <a:srgbClr val="FFFFFF"/>
+            </a:solidFill>
+            <a:ln w="9525">
+              <a:solidFill>
+                <a:srgbClr val="CBD5E1"/>
+              </a:solidFill>
+            </a:ln>
+            <a:effectLst/>
+          </p:spPr>
+          <p:style>
+            <a:lnRef idx="1">
+              <a:schemeClr val="accent1"/>
+            </a:lnRef>
+            <a:fillRef idx="3">
+              <a:schemeClr val="accent1"/>
+            </a:fillRef>
+            <a:effectRef idx="2">
+              <a:schemeClr val="accent1"/>
+            </a:effectRef>
+            <a:fontRef idx="minor">
+              <a:schemeClr val="lt1"/>
+            </a:fontRef>
+          </p:style>
+          <p:txBody>
+            <a:bodyPr rtlCol="0" anchor="ctr"/>
+            <a:lstStyle/>
+            <a:p>
+              <a:pPr marL="285750" marR="0" lvl="0" indent="-285750" algn="just" defTabSz="914400" rtl="0" eaLnBrk="0" fontAlgn="base" latinLnBrk="0" hangingPunct="0">
+                <a:lnSpc>
+                  <a:spcPct val="100000"/>
+                </a:lnSpc>
+                <a:spcBef>
+                  <a:spcPct val="0"/>
+                </a:spcBef>
+                <a:spcAft>
+                  <a:spcPct val="0"/>
+                </a:spcAft>
+                <a:buClrTx/>
+                <a:buSzTx/>
+                <a:buFont typeface="Wingdings" panose="05000000000000000000" pitchFamily="2" charset="2"/>
+                <a:buChar char="q"/>
+                <a:tabLst/>
+              </a:pPr>
+              <a:r>
+                <a:rPr kumimoji="0" lang="en-US" altLang="en-US" sz="1400" i="0" u="none" strike="noStrike" cap="none" normalizeH="0" baseline="0" dirty="0" err="1">
+                  <a:ln>
+                    <a:noFill/>
+                  </a:ln>
+                  <a:solidFill>
+                    <a:schemeClr val="tx1"/>
+                  </a:solidFill>
+                  <a:effectLst/>
+                  <a:latin typeface="Plus Jakarta Sans"/>
+                </a:rPr>
+                <a:t>Cakupan</a:t>
+              </a:r>
+              <a:r>
+                <a:rPr kumimoji="0" lang="en-US" altLang="en-US" sz="1400" i="0" u="none" strike="noStrike" cap="none" normalizeH="0" baseline="0" dirty="0">
+                  <a:ln>
+                    <a:noFill/>
+                  </a:ln>
+                  <a:solidFill>
+                    <a:schemeClr val="tx1"/>
+                  </a:solidFill>
+                  <a:effectLst/>
+                  <a:latin typeface="Plus Jakarta Sans"/>
+                </a:rPr>
+                <a:t> Wilayah &amp; Site: </a:t>
+              </a:r>
+              <a:r>
+                <a:rPr kumimoji="0" lang="en-US" altLang="en-US" sz="1400" i="0" u="none" strike="noStrike" cap="none" normalizeH="0" baseline="0" dirty="0" err="1">
+                  <a:ln>
+                    <a:noFill/>
+                  </a:ln>
+                  <a:solidFill>
+                    <a:schemeClr val="tx1"/>
+                  </a:solidFill>
+                  <a:effectLst/>
+                  <a:latin typeface="Plus Jakarta Sans"/>
+                </a:rPr>
+                <a:t>Peristiwa</a:t>
+              </a:r>
+              <a:r>
+                <a:rPr kumimoji="0" lang="en-US" altLang="en-US" sz="1400" i="0" u="none" strike="noStrike" cap="none" normalizeH="0" baseline="0" dirty="0">
+                  <a:ln>
+                    <a:noFill/>
+                  </a:ln>
+                  <a:solidFill>
+                    <a:schemeClr val="tx1"/>
+                  </a:solidFill>
+                  <a:effectLst/>
+                  <a:latin typeface="Plus Jakarta Sans"/>
+                </a:rPr>
+                <a:t> {{</a:t>
+              </a:r>
+              <a:r>
+                <a:rPr kumimoji="0" lang="en-US" altLang="en-US" sz="1400" i="0" u="none" strike="noStrike" cap="none" normalizeH="0" baseline="0" dirty="0" err="1">
+                  <a:ln>
+                    <a:noFill/>
+                  </a:ln>
+                  <a:solidFill>
+                    <a:schemeClr val="tx1"/>
+                  </a:solidFill>
+                  <a:effectLst/>
+                  <a:latin typeface="Plus Jakarta Sans"/>
+                </a:rPr>
+                <a:t>jenis_kejadian</a:t>
+              </a:r>
+              <a:r>
+                <a:rPr kumimoji="0" lang="en-US" altLang="en-US" sz="1400" i="0" u="none" strike="noStrike" cap="none" normalizeH="0" baseline="0" dirty="0">
+                  <a:ln>
+                    <a:noFill/>
+                  </a:ln>
+                  <a:solidFill>
+                    <a:schemeClr val="tx1"/>
+                  </a:solidFill>
+                  <a:effectLst/>
+                  <a:latin typeface="Plus Jakarta Sans"/>
+                </a:rPr>
+                <a:t>}} ({{</a:t>
+              </a:r>
+              <a:r>
+                <a:rPr kumimoji="0" lang="en-US" altLang="en-US" sz="1400" i="0" u="none" strike="noStrike" cap="none" normalizeH="0" baseline="0" dirty="0" err="1">
+                  <a:ln>
+                    <a:noFill/>
+                  </a:ln>
+                  <a:solidFill>
+                    <a:schemeClr val="tx1"/>
+                  </a:solidFill>
+                  <a:effectLst/>
+                  <a:latin typeface="Plus Jakarta Sans"/>
+                </a:rPr>
+                <a:t>detail_kejadian</a:t>
+              </a:r>
+              <a:r>
+                <a:rPr kumimoji="0" lang="en-US" altLang="en-US" sz="1400" i="0" u="none" strike="noStrike" cap="none" normalizeH="0" baseline="0" dirty="0">
+                  <a:ln>
+                    <a:noFill/>
+                  </a:ln>
+                  <a:solidFill>
+                    <a:schemeClr val="tx1"/>
+                  </a:solidFill>
+                  <a:effectLst/>
+                  <a:latin typeface="Plus Jakarta Sans"/>
+                </a:rPr>
+                <a:t>}}) di wilayah {{</a:t>
+              </a:r>
+              <a:r>
+                <a:rPr kumimoji="0" lang="en-US" altLang="en-US" sz="1400" i="0" u="none" strike="noStrike" cap="none" normalizeH="0" baseline="0" dirty="0" err="1">
+                  <a:ln>
+                    <a:noFill/>
+                  </a:ln>
+                  <a:solidFill>
+                    <a:schemeClr val="tx1"/>
+                  </a:solidFill>
+                  <a:effectLst/>
+                  <a:latin typeface="Plus Jakarta Sans"/>
+                </a:rPr>
+                <a:t>lokasi</a:t>
+              </a:r>
+              <a:r>
+                <a:rPr kumimoji="0" lang="en-US" altLang="en-US" sz="1400" i="0" u="none" strike="noStrike" cap="none" normalizeH="0" baseline="0" dirty="0">
+                  <a:ln>
+                    <a:noFill/>
+                  </a:ln>
+                  <a:solidFill>
+                    <a:schemeClr val="tx1"/>
+                  </a:solidFill>
+                  <a:effectLst/>
+                  <a:latin typeface="Plus Jakarta Sans"/>
+                </a:rPr>
+                <a:t>}} </a:t>
+              </a:r>
+              <a:r>
+                <a:rPr kumimoji="0" lang="en-US" altLang="en-US" sz="1400" i="0" u="none" strike="noStrike" cap="none" normalizeH="0" baseline="0" dirty="0" err="1">
+                  <a:ln>
+                    <a:noFill/>
+                  </a:ln>
+                  <a:solidFill>
+                    <a:schemeClr val="tx1"/>
+                  </a:solidFill>
+                  <a:effectLst/>
+                  <a:latin typeface="Plus Jakarta Sans"/>
+                </a:rPr>
+                <a:t>melingkupi</a:t>
+              </a:r>
+              <a:r>
+                <a:rPr kumimoji="0" lang="en-US" altLang="en-US" sz="1400" i="0" u="none" strike="noStrike" cap="none" normalizeH="0" baseline="0" dirty="0">
+                  <a:ln>
+                    <a:noFill/>
+                  </a:ln>
+                  <a:solidFill>
+                    <a:schemeClr val="tx1"/>
+                  </a:solidFill>
+                  <a:effectLst/>
+                  <a:latin typeface="Plus Jakarta Sans"/>
+                </a:rPr>
+                <a:t> total {{</a:t>
+              </a:r>
+              <a:r>
+                <a:rPr kumimoji="0" lang="en-US" altLang="en-US" sz="1400" i="0" u="none" strike="noStrike" cap="none" normalizeH="0" baseline="0" dirty="0" err="1">
+                  <a:ln>
+                    <a:noFill/>
+                  </a:ln>
+                  <a:solidFill>
+                    <a:schemeClr val="tx1"/>
+                  </a:solidFill>
+                  <a:effectLst/>
+                  <a:latin typeface="Plus Jakarta Sans"/>
+                </a:rPr>
+                <a:t>total_site</a:t>
+              </a:r>
+              <a:r>
+                <a:rPr kumimoji="0" lang="en-US" altLang="en-US" sz="1400" i="0" u="none" strike="noStrike" cap="none" normalizeH="0" baseline="0" dirty="0">
+                  <a:ln>
+                    <a:noFill/>
+                  </a:ln>
+                  <a:solidFill>
+                    <a:schemeClr val="tx1"/>
+                  </a:solidFill>
+                  <a:effectLst/>
+                  <a:latin typeface="Plus Jakarta Sans"/>
+                </a:rPr>
+                <a:t>}} site yang </a:t>
+              </a:r>
+              <a:r>
+                <a:rPr kumimoji="0" lang="en-US" altLang="en-US" sz="1400" i="0" u="none" strike="noStrike" cap="none" normalizeH="0" baseline="0" dirty="0" err="1">
+                  <a:ln>
+                    <a:noFill/>
+                  </a:ln>
+                  <a:solidFill>
+                    <a:schemeClr val="tx1"/>
+                  </a:solidFill>
+                  <a:effectLst/>
+                  <a:latin typeface="Plus Jakarta Sans"/>
+                </a:rPr>
+                <a:t>tersebar</a:t>
+              </a:r>
+              <a:r>
+                <a:rPr kumimoji="0" lang="en-US" altLang="en-US" sz="1400" i="0" u="none" strike="noStrike" cap="none" normalizeH="0" baseline="0" dirty="0">
+                  <a:ln>
+                    <a:noFill/>
+                  </a:ln>
+                  <a:solidFill>
+                    <a:schemeClr val="tx1"/>
+                  </a:solidFill>
+                  <a:effectLst/>
+                  <a:latin typeface="Plus Jakarta Sans"/>
+                </a:rPr>
+                <a:t> di {{</a:t>
+              </a:r>
+              <a:r>
+                <a:rPr kumimoji="0" lang="en-US" altLang="en-US" sz="1400" i="0" u="none" strike="noStrike" cap="none" normalizeH="0" baseline="0" dirty="0" err="1">
+                  <a:ln>
+                    <a:noFill/>
+                  </a:ln>
+                  <a:solidFill>
+                    <a:schemeClr val="tx1"/>
+                  </a:solidFill>
+                  <a:effectLst/>
+                  <a:latin typeface="Plus Jakarta Sans"/>
+                </a:rPr>
+                <a:t>n_kab</a:t>
+              </a:r>
+              <a:r>
+                <a:rPr kumimoji="0" lang="en-US" altLang="en-US" sz="1400" i="0" u="none" strike="noStrike" cap="none" normalizeH="0" baseline="0" dirty="0">
+                  <a:ln>
+                    <a:noFill/>
+                  </a:ln>
+                  <a:solidFill>
+                    <a:schemeClr val="tx1"/>
+                  </a:solidFill>
+                  <a:effectLst/>
+                  <a:latin typeface="Plus Jakarta Sans"/>
+                </a:rPr>
+                <a:t>}} </a:t>
+              </a:r>
+              <a:r>
+                <a:rPr kumimoji="0" lang="en-US" altLang="en-US" sz="1400" i="0" u="none" strike="noStrike" cap="none" normalizeH="0" baseline="0" dirty="0" err="1">
+                  <a:ln>
+                    <a:noFill/>
+                  </a:ln>
+                  <a:solidFill>
+                    <a:schemeClr val="tx1"/>
+                  </a:solidFill>
+                  <a:effectLst/>
+                  <a:latin typeface="Plus Jakarta Sans"/>
+                </a:rPr>
+                <a:t>Kabupaten</a:t>
+              </a:r>
+              <a:r>
+                <a:rPr kumimoji="0" lang="en-US" altLang="en-US" sz="1400" i="0" u="none" strike="noStrike" cap="none" normalizeH="0" baseline="0" dirty="0">
+                  <a:ln>
+                    <a:noFill/>
+                  </a:ln>
+                  <a:solidFill>
+                    <a:schemeClr val="tx1"/>
+                  </a:solidFill>
+                  <a:effectLst/>
+                  <a:latin typeface="Plus Jakarta Sans"/>
+                </a:rPr>
+                <a:t>, {{</a:t>
+              </a:r>
+              <a:r>
+                <a:rPr kumimoji="0" lang="en-US" altLang="en-US" sz="1400" i="0" u="none" strike="noStrike" cap="none" normalizeH="0" baseline="0" dirty="0" err="1">
+                  <a:ln>
+                    <a:noFill/>
+                  </a:ln>
+                  <a:solidFill>
+                    <a:schemeClr val="tx1"/>
+                  </a:solidFill>
+                  <a:effectLst/>
+                  <a:latin typeface="Plus Jakarta Sans"/>
+                </a:rPr>
+                <a:t>n_kec</a:t>
+              </a:r>
+              <a:r>
+                <a:rPr kumimoji="0" lang="en-US" altLang="en-US" sz="1400" i="0" u="none" strike="noStrike" cap="none" normalizeH="0" baseline="0" dirty="0">
+                  <a:ln>
+                    <a:noFill/>
+                  </a:ln>
+                  <a:solidFill>
+                    <a:schemeClr val="tx1"/>
+                  </a:solidFill>
+                  <a:effectLst/>
+                  <a:latin typeface="Plus Jakarta Sans"/>
+                </a:rPr>
+                <a:t>}} </a:t>
+              </a:r>
+              <a:r>
+                <a:rPr kumimoji="0" lang="en-US" altLang="en-US" sz="1400" i="0" u="none" strike="noStrike" cap="none" normalizeH="0" baseline="0" dirty="0" err="1">
+                  <a:ln>
+                    <a:noFill/>
+                  </a:ln>
+                  <a:solidFill>
+                    <a:schemeClr val="tx1"/>
+                  </a:solidFill>
+                  <a:effectLst/>
+                  <a:latin typeface="Plus Jakarta Sans"/>
+                </a:rPr>
+                <a:t>Kecamatan</a:t>
+              </a:r>
+              <a:r>
+                <a:rPr kumimoji="0" lang="en-US" altLang="en-US" sz="1400" i="0" u="none" strike="noStrike" cap="none" normalizeH="0" baseline="0" dirty="0">
+                  <a:ln>
+                    <a:noFill/>
+                  </a:ln>
+                  <a:solidFill>
+                    <a:schemeClr val="tx1"/>
+                  </a:solidFill>
+                  <a:effectLst/>
+                  <a:latin typeface="Plus Jakarta Sans"/>
+                </a:rPr>
+                <a:t>, dan {{</a:t>
+              </a:r>
+              <a:r>
+                <a:rPr kumimoji="0" lang="en-US" altLang="en-US" sz="1400" i="0" u="none" strike="noStrike" cap="none" normalizeH="0" baseline="0" dirty="0" err="1">
+                  <a:ln>
+                    <a:noFill/>
+                  </a:ln>
+                  <a:solidFill>
+                    <a:schemeClr val="tx1"/>
+                  </a:solidFill>
+                  <a:effectLst/>
+                  <a:latin typeface="Plus Jakarta Sans"/>
+                </a:rPr>
+                <a:t>n_desa</a:t>
+              </a:r>
+              <a:r>
+                <a:rPr kumimoji="0" lang="en-US" altLang="en-US" sz="1400" i="0" u="none" strike="noStrike" cap="none" normalizeH="0" baseline="0" dirty="0">
+                  <a:ln>
+                    <a:noFill/>
+                  </a:ln>
+                  <a:solidFill>
+                    <a:schemeClr val="tx1"/>
+                  </a:solidFill>
+                  <a:effectLst/>
+                  <a:latin typeface="Plus Jakarta Sans"/>
+                </a:rPr>
+                <a:t>}} </a:t>
+              </a:r>
+              <a:r>
+                <a:rPr kumimoji="0" lang="en-US" altLang="en-US" sz="1400" i="0" u="none" strike="noStrike" cap="none" normalizeH="0" baseline="0" dirty="0" err="1">
+                  <a:ln>
+                    <a:noFill/>
+                  </a:ln>
+                  <a:solidFill>
+                    <a:schemeClr val="tx1"/>
+                  </a:solidFill>
+                  <a:effectLst/>
+                  <a:latin typeface="Plus Jakarta Sans"/>
+                </a:rPr>
+                <a:t>Desa</a:t>
+              </a:r>
+              <a:r>
+                <a:rPr kumimoji="0" lang="en-US" altLang="en-US" sz="1400" i="0" u="none" strike="noStrike" cap="none" normalizeH="0" baseline="0" dirty="0">
+                  <a:ln>
+                    <a:noFill/>
+                  </a:ln>
+                  <a:solidFill>
+                    <a:schemeClr val="tx1"/>
+                  </a:solidFill>
+                  <a:effectLst/>
+                  <a:latin typeface="Plus Jakarta Sans"/>
+                </a:rPr>
+                <a:t>.</a:t>
+              </a:r>
+            </a:p>
+            <a:p>
+              <a:pPr marL="285750" marR="0" lvl="0" indent="-285750" algn="just" defTabSz="914400" rtl="0" eaLnBrk="0" fontAlgn="base" latinLnBrk="0" hangingPunct="0">
+                <a:lnSpc>
+                  <a:spcPct val="100000"/>
+                </a:lnSpc>
+                <a:spcBef>
+                  <a:spcPct val="0"/>
+                </a:spcBef>
+                <a:spcAft>
+                  <a:spcPct val="0"/>
+                </a:spcAft>
+                <a:buClrTx/>
+                <a:buSzTx/>
+                <a:buFont typeface="Wingdings" panose="05000000000000000000" pitchFamily="2" charset="2"/>
+                <a:buChar char="q"/>
+                <a:tabLst/>
+              </a:pPr>
+              <a:r>
+                <a:rPr kumimoji="0" lang="en-US" altLang="en-US" sz="1400" i="0" u="none" strike="noStrike" cap="none" normalizeH="0" baseline="0" dirty="0" err="1">
+                  <a:ln>
+                    <a:noFill/>
+                  </a:ln>
+                  <a:solidFill>
+                    <a:schemeClr val="tx1"/>
+                  </a:solidFill>
+                  <a:effectLst/>
+                  <a:latin typeface="Plus Jakarta Sans"/>
+                </a:rPr>
+                <a:t>Kondisi</a:t>
+              </a:r>
+              <a:r>
+                <a:rPr kumimoji="0" lang="en-US" altLang="en-US" sz="1400" i="0" u="none" strike="noStrike" cap="none" normalizeH="0" baseline="0" dirty="0">
+                  <a:ln>
+                    <a:noFill/>
+                  </a:ln>
+                  <a:solidFill>
+                    <a:schemeClr val="tx1"/>
+                  </a:solidFill>
+                  <a:effectLst/>
+                  <a:latin typeface="Plus Jakarta Sans"/>
+                </a:rPr>
+                <a:t> </a:t>
+              </a:r>
+              <a:r>
+                <a:rPr kumimoji="0" lang="en-US" altLang="en-US" sz="1400" i="0" u="none" strike="noStrike" cap="none" normalizeH="0" baseline="0" dirty="0" err="1">
+                  <a:ln>
+                    <a:noFill/>
+                  </a:ln>
+                  <a:solidFill>
+                    <a:schemeClr val="tx1"/>
+                  </a:solidFill>
+                  <a:effectLst/>
+                  <a:latin typeface="Plus Jakarta Sans"/>
+                </a:rPr>
+                <a:t>Layanan</a:t>
+              </a:r>
+              <a:r>
+                <a:rPr kumimoji="0" lang="en-US" altLang="en-US" sz="1400" i="0" u="none" strike="noStrike" cap="none" normalizeH="0" baseline="0" dirty="0">
+                  <a:ln>
+                    <a:noFill/>
+                  </a:ln>
+                  <a:solidFill>
+                    <a:schemeClr val="tx1"/>
+                  </a:solidFill>
+                  <a:effectLst/>
+                  <a:latin typeface="Plus Jakarta Sans"/>
+                </a:rPr>
+                <a:t> </a:t>
+              </a:r>
+              <a:r>
+                <a:rPr kumimoji="0" lang="en-US" altLang="en-US" sz="1400" i="0" u="none" strike="noStrike" cap="none" normalizeH="0" baseline="0" dirty="0" err="1">
+                  <a:ln>
+                    <a:noFill/>
+                  </a:ln>
+                  <a:solidFill>
+                    <a:schemeClr val="tx1"/>
+                  </a:solidFill>
+                  <a:effectLst/>
+                  <a:latin typeface="Plus Jakarta Sans"/>
+                </a:rPr>
+                <a:t>Terkini</a:t>
+              </a:r>
+              <a:r>
+                <a:rPr kumimoji="0" lang="en-US" altLang="en-US" sz="1400" i="0" u="none" strike="noStrike" cap="none" normalizeH="0" baseline="0" dirty="0">
+                  <a:ln>
+                    <a:noFill/>
+                  </a:ln>
+                  <a:solidFill>
+                    <a:schemeClr val="tx1"/>
+                  </a:solidFill>
+                  <a:effectLst/>
+                  <a:latin typeface="Plus Jakarta Sans"/>
+                </a:rPr>
+                <a:t>: </a:t>
+              </a:r>
+              <a:r>
+                <a:rPr kumimoji="0" lang="en-US" altLang="en-US" sz="1400" i="0" u="none" strike="noStrike" cap="none" normalizeH="0" baseline="0" dirty="0" err="1">
+                  <a:ln>
+                    <a:noFill/>
+                  </a:ln>
+                  <a:solidFill>
+                    <a:schemeClr val="tx1"/>
+                  </a:solidFill>
+                  <a:effectLst/>
+                  <a:latin typeface="Plus Jakarta Sans"/>
+                </a:rPr>
+                <a:t>Tercatat</a:t>
+              </a:r>
+              <a:r>
+                <a:rPr kumimoji="0" lang="en-US" altLang="en-US" sz="1400" i="0" u="none" strike="noStrike" cap="none" normalizeH="0" baseline="0" dirty="0">
+                  <a:ln>
+                    <a:noFill/>
+                  </a:ln>
+                  <a:solidFill>
+                    <a:schemeClr val="tx1"/>
+                  </a:solidFill>
+                  <a:effectLst/>
+                  <a:latin typeface="Plus Jakarta Sans"/>
+                </a:rPr>
+                <a:t> </a:t>
+              </a:r>
+              <a:r>
+                <a:rPr kumimoji="0" lang="en-US" altLang="en-US" sz="1400" i="0" u="none" strike="noStrike" cap="none" normalizeH="0" baseline="0" dirty="0" err="1">
+                  <a:ln>
+                    <a:noFill/>
+                  </a:ln>
+                  <a:solidFill>
+                    <a:schemeClr val="tx1"/>
+                  </a:solidFill>
+                  <a:effectLst/>
+                  <a:latin typeface="Plus Jakarta Sans"/>
+                </a:rPr>
+                <a:t>sebanyak</a:t>
+              </a:r>
+              <a:r>
+                <a:rPr kumimoji="0" lang="en-US" altLang="en-US" sz="1400" i="0" u="none" strike="noStrike" cap="none" normalizeH="0" baseline="0" dirty="0">
+                  <a:ln>
+                    <a:noFill/>
+                  </a:ln>
+                  <a:solidFill>
+                    <a:schemeClr val="tx1"/>
+                  </a:solidFill>
+                  <a:effectLst/>
+                  <a:latin typeface="Plus Jakarta Sans"/>
+                </a:rPr>
+                <a:t> {{</a:t>
+              </a:r>
+              <a:r>
+                <a:rPr kumimoji="0" lang="en-US" altLang="en-US" sz="1400" i="0" u="none" strike="noStrike" cap="none" normalizeH="0" baseline="0" dirty="0" err="1">
+                  <a:ln>
+                    <a:noFill/>
+                  </a:ln>
+                  <a:solidFill>
+                    <a:schemeClr val="tx1"/>
+                  </a:solidFill>
+                  <a:effectLst/>
+                  <a:latin typeface="Plus Jakarta Sans"/>
+                </a:rPr>
+                <a:t>site_up</a:t>
+              </a:r>
+              <a:r>
+                <a:rPr kumimoji="0" lang="en-US" altLang="en-US" sz="1400" i="0" u="none" strike="noStrike" cap="none" normalizeH="0" baseline="0" dirty="0">
+                  <a:ln>
+                    <a:noFill/>
+                  </a:ln>
+                  <a:solidFill>
+                    <a:schemeClr val="tx1"/>
+                  </a:solidFill>
+                  <a:effectLst/>
+                  <a:latin typeface="Plus Jakarta Sans"/>
+                </a:rPr>
+                <a:t>}} site (Normal/Up) dan {{</a:t>
+              </a:r>
+              <a:r>
+                <a:rPr kumimoji="0" lang="en-US" altLang="en-US" sz="1400" i="0" u="none" strike="noStrike" cap="none" normalizeH="0" baseline="0" dirty="0" err="1">
+                  <a:ln>
+                    <a:noFill/>
+                  </a:ln>
+                  <a:solidFill>
+                    <a:schemeClr val="tx1"/>
+                  </a:solidFill>
+                  <a:effectLst/>
+                  <a:latin typeface="Plus Jakarta Sans"/>
+                </a:rPr>
+                <a:t>site_down</a:t>
+              </a:r>
+              <a:r>
+                <a:rPr kumimoji="0" lang="en-US" altLang="en-US" sz="1400" i="0" u="none" strike="noStrike" cap="none" normalizeH="0" baseline="0" dirty="0">
+                  <a:ln>
+                    <a:noFill/>
+                  </a:ln>
+                  <a:solidFill>
+                    <a:schemeClr val="tx1"/>
+                  </a:solidFill>
+                  <a:effectLst/>
+                  <a:latin typeface="Plus Jakarta Sans"/>
+                </a:rPr>
+                <a:t>}} site (Down/</a:t>
+              </a:r>
+              <a:r>
+                <a:rPr kumimoji="0" lang="en-US" altLang="en-US" sz="1400" i="0" u="none" strike="noStrike" cap="none" normalizeH="0" baseline="0" dirty="0" err="1">
+                  <a:ln>
+                    <a:noFill/>
+                  </a:ln>
+                  <a:solidFill>
+                    <a:schemeClr val="tx1"/>
+                  </a:solidFill>
+                  <a:effectLst/>
+                  <a:latin typeface="Plus Jakarta Sans"/>
+                </a:rPr>
+                <a:t>Kritis</a:t>
+              </a:r>
+              <a:r>
+                <a:rPr kumimoji="0" lang="en-US" altLang="en-US" sz="1400" i="0" u="none" strike="noStrike" cap="none" normalizeH="0" baseline="0" dirty="0">
+                  <a:ln>
+                    <a:noFill/>
+                  </a:ln>
+                  <a:solidFill>
+                    <a:schemeClr val="tx1"/>
+                  </a:solidFill>
+                  <a:effectLst/>
+                  <a:latin typeface="Plus Jakarta Sans"/>
+                </a:rPr>
+                <a:t>).</a:t>
+              </a:r>
+            </a:p>
+            <a:p>
+              <a:pPr marL="285750" marR="0" lvl="0" indent="-285750" algn="just" defTabSz="914400" rtl="0" eaLnBrk="0" fontAlgn="base" latinLnBrk="0" hangingPunct="0">
+                <a:lnSpc>
+                  <a:spcPct val="100000"/>
+                </a:lnSpc>
+                <a:spcBef>
+                  <a:spcPct val="0"/>
+                </a:spcBef>
+                <a:spcAft>
+                  <a:spcPct val="0"/>
+                </a:spcAft>
+                <a:buClrTx/>
+                <a:buSzTx/>
+                <a:buFont typeface="Wingdings" panose="05000000000000000000" pitchFamily="2" charset="2"/>
+                <a:buChar char="q"/>
+                <a:tabLst/>
+              </a:pPr>
+              <a:r>
+                <a:rPr kumimoji="0" lang="en-US" altLang="en-US" sz="1400" b="1" i="0" u="none" strike="noStrike" cap="none" normalizeH="0" baseline="0" dirty="0">
+                  <a:ln>
+                    <a:noFill/>
+                  </a:ln>
+                  <a:solidFill>
+                    <a:schemeClr val="tx1"/>
+                  </a:solidFill>
+                  <a:effectLst/>
+                  <a:latin typeface="Plus Jakarta Sans"/>
+                </a:rPr>
+                <a:t>Wilayah </a:t>
+              </a:r>
+              <a:r>
+                <a:rPr kumimoji="0" lang="en-US" altLang="en-US" sz="1400" b="1" i="0" u="none" strike="noStrike" cap="none" normalizeH="0" baseline="0" dirty="0" err="1">
+                  <a:ln>
+                    <a:noFill/>
+                  </a:ln>
+                  <a:solidFill>
+                    <a:schemeClr val="tx1"/>
+                  </a:solidFill>
+                  <a:effectLst/>
+                  <a:latin typeface="Plus Jakarta Sans"/>
+                </a:rPr>
+                <a:t>Dampak</a:t>
+              </a:r>
+              <a:r>
+                <a:rPr kumimoji="0" lang="en-US" altLang="en-US" sz="1400" b="1" i="0" u="none" strike="noStrike" cap="none" normalizeH="0" baseline="0" dirty="0">
+                  <a:ln>
+                    <a:noFill/>
+                  </a:ln>
+                  <a:solidFill>
+                    <a:schemeClr val="tx1"/>
+                  </a:solidFill>
+                  <a:effectLst/>
+                  <a:latin typeface="Plus Jakarta Sans"/>
+                </a:rPr>
+                <a:t> </a:t>
+              </a:r>
+              <a:r>
+                <a:rPr kumimoji="0" lang="en-US" altLang="en-US" sz="1400" b="1" i="0" u="none" strike="noStrike" cap="none" normalizeH="0" baseline="0" dirty="0" err="1">
+                  <a:ln>
+                    <a:noFill/>
+                  </a:ln>
+                  <a:solidFill>
+                    <a:schemeClr val="tx1"/>
+                  </a:solidFill>
+                  <a:effectLst/>
+                  <a:latin typeface="Plus Jakarta Sans"/>
+                </a:rPr>
+                <a:t>Tertinggi</a:t>
+              </a:r>
+              <a:r>
+                <a:rPr kumimoji="0" lang="en-US" altLang="en-US" sz="1400" i="0" u="none" strike="noStrike" cap="none" normalizeH="0" baseline="0" dirty="0">
+                  <a:ln>
+                    <a:noFill/>
+                  </a:ln>
+                  <a:solidFill>
+                    <a:schemeClr val="tx1"/>
+                  </a:solidFill>
+                  <a:effectLst/>
+                  <a:latin typeface="Plus Jakarta Sans"/>
+                </a:rPr>
+                <a:t>: </a:t>
+              </a:r>
+              <a:r>
+                <a:rPr kumimoji="0" lang="en-US" altLang="en-US" sz="1400" i="0" u="none" strike="noStrike" cap="none" normalizeH="0" baseline="0" dirty="0" err="1">
+                  <a:ln>
+                    <a:noFill/>
+                  </a:ln>
+                  <a:solidFill>
+                    <a:schemeClr val="tx1"/>
+                  </a:solidFill>
+                  <a:effectLst/>
+                  <a:latin typeface="Plus Jakarta Sans"/>
+                </a:rPr>
+                <a:t>Konsentrasi</a:t>
+              </a:r>
+              <a:r>
+                <a:rPr kumimoji="0" lang="en-US" altLang="en-US" sz="1400" i="0" u="none" strike="noStrike" cap="none" normalizeH="0" baseline="0" dirty="0">
+                  <a:ln>
+                    <a:noFill/>
+                  </a:ln>
+                  <a:solidFill>
+                    <a:schemeClr val="tx1"/>
+                  </a:solidFill>
+                  <a:effectLst/>
+                  <a:latin typeface="Plus Jakarta Sans"/>
+                </a:rPr>
+                <a:t> site down </a:t>
+              </a:r>
+              <a:r>
+                <a:rPr kumimoji="0" lang="en-US" altLang="en-US" sz="1400" i="0" u="none" strike="noStrike" cap="none" normalizeH="0" baseline="0" dirty="0" err="1">
+                  <a:ln>
+                    <a:noFill/>
+                  </a:ln>
+                  <a:solidFill>
+                    <a:schemeClr val="tx1"/>
+                  </a:solidFill>
+                  <a:effectLst/>
+                  <a:latin typeface="Plus Jakarta Sans"/>
+                </a:rPr>
+                <a:t>tertinggi</a:t>
+              </a:r>
+              <a:r>
+                <a:rPr kumimoji="0" lang="en-US" altLang="en-US" sz="1400" i="0" u="none" strike="noStrike" cap="none" normalizeH="0" baseline="0" dirty="0">
+                  <a:ln>
+                    <a:noFill/>
+                  </a:ln>
+                  <a:solidFill>
+                    <a:schemeClr val="tx1"/>
+                  </a:solidFill>
+                  <a:effectLst/>
+                  <a:latin typeface="Plus Jakarta Sans"/>
+                </a:rPr>
+                <a:t> </a:t>
+              </a:r>
+              <a:r>
+                <a:rPr kumimoji="0" lang="en-US" altLang="en-US" sz="1400" i="0" u="none" strike="noStrike" cap="none" normalizeH="0" baseline="0" dirty="0" err="1">
+                  <a:ln>
+                    <a:noFill/>
+                  </a:ln>
+                  <a:solidFill>
+                    <a:schemeClr val="tx1"/>
+                  </a:solidFill>
+                  <a:effectLst/>
+                  <a:latin typeface="Plus Jakarta Sans"/>
+                </a:rPr>
+                <a:t>berada</a:t>
+              </a:r>
+              <a:r>
+                <a:rPr kumimoji="0" lang="en-US" altLang="en-US" sz="1400" i="0" u="none" strike="noStrike" cap="none" normalizeH="0" baseline="0" dirty="0">
+                  <a:ln>
+                    <a:noFill/>
+                  </a:ln>
+                  <a:solidFill>
+                    <a:schemeClr val="tx1"/>
+                  </a:solidFill>
+                  <a:effectLst/>
+                  <a:latin typeface="Plus Jakarta Sans"/>
+                </a:rPr>
+                <a:t> di </a:t>
+              </a:r>
+              <a:r>
+                <a:rPr kumimoji="0" lang="en-US" altLang="en-US" sz="1400" i="0" u="none" strike="noStrike" cap="none" normalizeH="0" baseline="0" dirty="0" err="1">
+                  <a:ln>
+                    <a:noFill/>
+                  </a:ln>
+                  <a:solidFill>
+                    <a:schemeClr val="tx1"/>
+                  </a:solidFill>
+                  <a:effectLst/>
+                  <a:latin typeface="Plus Jakarta Sans"/>
+                </a:rPr>
+                <a:t>Kabupaten</a:t>
+              </a:r>
+              <a:r>
+                <a:rPr kumimoji="0" lang="en-US" altLang="en-US" sz="1400" i="0" u="none" strike="noStrike" cap="none" normalizeH="0" baseline="0" dirty="0">
+                  <a:ln>
+                    <a:noFill/>
+                  </a:ln>
+                  <a:solidFill>
+                    <a:schemeClr val="tx1"/>
+                  </a:solidFill>
+                  <a:effectLst/>
+                  <a:latin typeface="Plus Jakarta Sans"/>
+                </a:rPr>
+                <a:t> {{</a:t>
+              </a:r>
+              <a:r>
+                <a:rPr kumimoji="0" lang="en-US" altLang="en-US" sz="1400" i="0" u="none" strike="noStrike" cap="none" normalizeH="0" baseline="0" dirty="0" err="1">
+                  <a:ln>
+                    <a:noFill/>
+                  </a:ln>
+                  <a:solidFill>
+                    <a:schemeClr val="tx1"/>
+                  </a:solidFill>
+                  <a:effectLst/>
+                  <a:latin typeface="Plus Jakarta Sans"/>
+                </a:rPr>
+                <a:t>top_kab_down</a:t>
+              </a:r>
+              <a:r>
+                <a:rPr kumimoji="0" lang="en-US" altLang="en-US" sz="1400" i="0" u="none" strike="noStrike" cap="none" normalizeH="0" baseline="0" dirty="0">
+                  <a:ln>
+                    <a:noFill/>
+                  </a:ln>
+                  <a:solidFill>
+                    <a:schemeClr val="tx1"/>
+                  </a:solidFill>
+                  <a:effectLst/>
+                  <a:latin typeface="Plus Jakarta Sans"/>
+                </a:rPr>
+                <a:t>}} </a:t>
+              </a:r>
+              <a:r>
+                <a:rPr kumimoji="0" lang="en-US" altLang="en-US" sz="1400" i="0" u="none" strike="noStrike" cap="none" normalizeH="0" baseline="0" dirty="0" err="1">
+                  <a:ln>
+                    <a:noFill/>
+                  </a:ln>
+                  <a:solidFill>
+                    <a:schemeClr val="tx1"/>
+                  </a:solidFill>
+                  <a:effectLst/>
+                  <a:latin typeface="Plus Jakarta Sans"/>
+                </a:rPr>
+                <a:t>dengan</a:t>
+              </a:r>
+              <a:r>
+                <a:rPr kumimoji="0" lang="en-US" altLang="en-US" sz="1400" i="0" u="none" strike="noStrike" cap="none" normalizeH="0" baseline="0" dirty="0">
+                  <a:ln>
+                    <a:noFill/>
+                  </a:ln>
+                  <a:solidFill>
+                    <a:schemeClr val="tx1"/>
+                  </a:solidFill>
+                  <a:effectLst/>
+                  <a:latin typeface="Plus Jakarta Sans"/>
+                </a:rPr>
+                <a:t> total {{</a:t>
+              </a:r>
+              <a:r>
+                <a:rPr kumimoji="0" lang="en-US" altLang="en-US" sz="1400" i="0" u="none" strike="noStrike" cap="none" normalizeH="0" baseline="0" dirty="0" err="1">
+                  <a:ln>
+                    <a:noFill/>
+                  </a:ln>
+                  <a:solidFill>
+                    <a:schemeClr val="tx1"/>
+                  </a:solidFill>
+                  <a:effectLst/>
+                  <a:latin typeface="Plus Jakarta Sans"/>
+                </a:rPr>
+                <a:t>top_kab_down_count</a:t>
+              </a:r>
+              <a:r>
+                <a:rPr kumimoji="0" lang="en-US" altLang="en-US" sz="1400" i="0" u="none" strike="noStrike" cap="none" normalizeH="0" baseline="0" dirty="0">
+                  <a:ln>
+                    <a:noFill/>
+                  </a:ln>
+                  <a:solidFill>
+                    <a:schemeClr val="tx1"/>
+                  </a:solidFill>
+                  <a:effectLst/>
+                  <a:latin typeface="Plus Jakarta Sans"/>
+                </a:rPr>
+                <a:t>}} site down (</a:t>
+              </a:r>
+              <a:r>
+                <a:rPr kumimoji="0" lang="en-US" altLang="en-US" sz="1400" i="0" u="none" strike="noStrike" cap="none" normalizeH="0" baseline="0" dirty="0" err="1">
+                  <a:ln>
+                    <a:noFill/>
+                  </a:ln>
+                  <a:solidFill>
+                    <a:schemeClr val="tx1"/>
+                  </a:solidFill>
+                  <a:effectLst/>
+                  <a:latin typeface="Plus Jakarta Sans"/>
+                </a:rPr>
+                <a:t>rincian</a:t>
+              </a:r>
+              <a:r>
+                <a:rPr kumimoji="0" lang="en-US" altLang="en-US" sz="1400" i="0" u="none" strike="noStrike" cap="none" normalizeH="0" baseline="0" dirty="0">
+                  <a:ln>
+                    <a:noFill/>
+                  </a:ln>
+                  <a:solidFill>
+                    <a:schemeClr val="tx1"/>
+                  </a:solidFill>
+                  <a:effectLst/>
+                  <a:latin typeface="Plus Jakarta Sans"/>
+                </a:rPr>
+                <a:t>: {{top_kab_down_4g}} Site 4G &amp; {{</a:t>
+              </a:r>
+              <a:r>
+                <a:rPr kumimoji="0" lang="en-US" altLang="en-US" sz="1400" i="0" u="none" strike="noStrike" cap="none" normalizeH="0" baseline="0" dirty="0" err="1">
+                  <a:ln>
+                    <a:noFill/>
+                  </a:ln>
+                  <a:solidFill>
+                    <a:schemeClr val="tx1"/>
+                  </a:solidFill>
+                  <a:effectLst/>
+                  <a:latin typeface="Plus Jakarta Sans"/>
+                </a:rPr>
+                <a:t>top_kab_down_uso</a:t>
+              </a:r>
+              <a:r>
+                <a:rPr kumimoji="0" lang="en-US" altLang="en-US" sz="1400" i="0" u="none" strike="noStrike" cap="none" normalizeH="0" baseline="0" dirty="0">
+                  <a:ln>
+                    <a:noFill/>
+                  </a:ln>
+                  <a:solidFill>
+                    <a:schemeClr val="tx1"/>
+                  </a:solidFill>
+                  <a:effectLst/>
+                  <a:latin typeface="Plus Jakarta Sans"/>
+                </a:rPr>
+                <a:t>}} Site USO). </a:t>
+              </a:r>
+            </a:p>
+            <a:p>
+              <a:pPr marL="285750" marR="0" lvl="0" indent="-285750" algn="just" defTabSz="914400" rtl="0" eaLnBrk="0" fontAlgn="base" latinLnBrk="0" hangingPunct="0">
+                <a:lnSpc>
+                  <a:spcPct val="100000"/>
+                </a:lnSpc>
+                <a:spcBef>
+                  <a:spcPct val="0"/>
+                </a:spcBef>
+                <a:spcAft>
+                  <a:spcPct val="0"/>
+                </a:spcAft>
+                <a:buClrTx/>
+                <a:buSzTx/>
+                <a:buFont typeface="Wingdings" panose="05000000000000000000" pitchFamily="2" charset="2"/>
+                <a:buChar char="q"/>
+                <a:tabLst/>
+              </a:pPr>
+              <a:r>
+                <a:rPr kumimoji="0" lang="en-US" altLang="en-US" sz="1400" i="0" u="none" strike="noStrike" cap="none" normalizeH="0" baseline="0" dirty="0" err="1">
+                  <a:ln>
+                    <a:noFill/>
+                  </a:ln>
+                  <a:solidFill>
+                    <a:schemeClr val="tx1"/>
+                  </a:solidFill>
+                  <a:effectLst/>
+                  <a:latin typeface="Plus Jakarta Sans"/>
+                </a:rPr>
+                <a:t>Tindak</a:t>
+              </a:r>
+              <a:r>
+                <a:rPr kumimoji="0" lang="en-US" altLang="en-US" sz="1400" i="0" u="none" strike="noStrike" cap="none" normalizeH="0" baseline="0" dirty="0">
+                  <a:ln>
+                    <a:noFill/>
+                  </a:ln>
+                  <a:solidFill>
+                    <a:schemeClr val="tx1"/>
+                  </a:solidFill>
+                  <a:effectLst/>
+                  <a:latin typeface="Plus Jakarta Sans"/>
+                </a:rPr>
+                <a:t> </a:t>
+              </a:r>
+              <a:r>
+                <a:rPr kumimoji="0" lang="en-US" altLang="en-US" sz="1400" i="0" u="none" strike="noStrike" cap="none" normalizeH="0" baseline="0" dirty="0" err="1">
+                  <a:ln>
+                    <a:noFill/>
+                  </a:ln>
+                  <a:solidFill>
+                    <a:schemeClr val="tx1"/>
+                  </a:solidFill>
+                  <a:effectLst/>
+                  <a:latin typeface="Plus Jakarta Sans"/>
+                </a:rPr>
+                <a:t>Lanjut</a:t>
+              </a:r>
+              <a:r>
+                <a:rPr kumimoji="0" lang="en-US" altLang="en-US" sz="1400" i="0" u="none" strike="noStrike" cap="none" normalizeH="0" baseline="0" dirty="0">
+                  <a:ln>
+                    <a:noFill/>
+                  </a:ln>
+                  <a:solidFill>
+                    <a:schemeClr val="tx1"/>
+                  </a:solidFill>
+                  <a:effectLst/>
+                  <a:latin typeface="Plus Jakarta Sans"/>
+                </a:rPr>
+                <a:t> </a:t>
+              </a:r>
+              <a:r>
+                <a:rPr kumimoji="0" lang="en-US" altLang="en-US" sz="1400" i="0" u="none" strike="noStrike" cap="none" normalizeH="0" baseline="0" dirty="0" err="1">
+                  <a:ln>
+                    <a:noFill/>
+                  </a:ln>
+                  <a:solidFill>
+                    <a:schemeClr val="tx1"/>
+                  </a:solidFill>
+                  <a:effectLst/>
+                  <a:latin typeface="Plus Jakarta Sans"/>
+                </a:rPr>
+                <a:t>Mitigasi</a:t>
+              </a:r>
+              <a:r>
+                <a:rPr kumimoji="0" lang="en-US" altLang="en-US" sz="1400" i="0" u="none" strike="noStrike" cap="none" normalizeH="0" baseline="0" dirty="0">
+                  <a:ln>
+                    <a:noFill/>
+                  </a:ln>
+                  <a:solidFill>
+                    <a:schemeClr val="tx1"/>
+                  </a:solidFill>
+                  <a:effectLst/>
+                  <a:latin typeface="Plus Jakarta Sans"/>
+                </a:rPr>
+                <a:t>: Tim </a:t>
+              </a:r>
+              <a:r>
+                <a:rPr kumimoji="0" lang="en-US" altLang="en-US" sz="1400" i="0" u="none" strike="noStrike" cap="none" normalizeH="0" baseline="0" dirty="0" err="1">
+                  <a:ln>
+                    <a:noFill/>
+                  </a:ln>
+                  <a:solidFill>
+                    <a:schemeClr val="tx1"/>
+                  </a:solidFill>
+                  <a:effectLst/>
+                  <a:latin typeface="Plus Jakarta Sans"/>
+                </a:rPr>
+                <a:t>operasional</a:t>
+              </a:r>
+              <a:r>
+                <a:rPr kumimoji="0" lang="en-US" altLang="en-US" sz="1400" i="0" u="none" strike="noStrike" cap="none" normalizeH="0" baseline="0" dirty="0">
+                  <a:ln>
+                    <a:noFill/>
+                  </a:ln>
+                  <a:solidFill>
+                    <a:schemeClr val="tx1"/>
+                  </a:solidFill>
+                  <a:effectLst/>
+                  <a:latin typeface="Plus Jakarta Sans"/>
+                </a:rPr>
+                <a:t> BAKTI </a:t>
+              </a:r>
+              <a:r>
+                <a:rPr kumimoji="0" lang="en-US" altLang="en-US" sz="1400" i="0" u="none" strike="noStrike" cap="none" normalizeH="0" baseline="0" dirty="0" err="1">
+                  <a:ln>
+                    <a:noFill/>
+                  </a:ln>
+                  <a:solidFill>
+                    <a:schemeClr val="tx1"/>
+                  </a:solidFill>
+                  <a:effectLst/>
+                  <a:latin typeface="Plus Jakarta Sans"/>
+                </a:rPr>
+                <a:t>bersama</a:t>
+              </a:r>
+              <a:r>
+                <a:rPr kumimoji="0" lang="en-US" altLang="en-US" sz="1400" i="0" u="none" strike="noStrike" cap="none" normalizeH="0" baseline="0" dirty="0">
+                  <a:ln>
+                    <a:noFill/>
+                  </a:ln>
+                  <a:solidFill>
+                    <a:schemeClr val="tx1"/>
+                  </a:solidFill>
+                  <a:effectLst/>
+                  <a:latin typeface="Plus Jakarta Sans"/>
+                </a:rPr>
+                <a:t> </a:t>
+              </a:r>
+              <a:r>
+                <a:rPr kumimoji="0" lang="en-US" altLang="en-US" sz="1400" i="0" u="none" strike="noStrike" cap="none" normalizeH="0" baseline="0" dirty="0" err="1">
+                  <a:ln>
+                    <a:noFill/>
+                  </a:ln>
+                  <a:solidFill>
+                    <a:schemeClr val="tx1"/>
+                  </a:solidFill>
+                  <a:effectLst/>
+                  <a:latin typeface="Plus Jakarta Sans"/>
+                </a:rPr>
+                <a:t>mitra</a:t>
+              </a:r>
+              <a:r>
+                <a:rPr kumimoji="0" lang="en-US" altLang="en-US" sz="1400" i="0" u="none" strike="noStrike" cap="none" normalizeH="0" baseline="0" dirty="0">
+                  <a:ln>
+                    <a:noFill/>
+                  </a:ln>
+                  <a:solidFill>
+                    <a:schemeClr val="tx1"/>
+                  </a:solidFill>
+                  <a:effectLst/>
+                  <a:latin typeface="Plus Jakarta Sans"/>
+                </a:rPr>
+                <a:t> </a:t>
+              </a:r>
+              <a:r>
+                <a:rPr kumimoji="0" lang="en-US" altLang="en-US" sz="1400" i="0" u="none" strike="noStrike" cap="none" normalizeH="0" baseline="0" dirty="0" err="1">
+                  <a:ln>
+                    <a:noFill/>
+                  </a:ln>
+                  <a:solidFill>
+                    <a:schemeClr val="tx1"/>
+                  </a:solidFill>
+                  <a:effectLst/>
+                  <a:latin typeface="Plus Jakarta Sans"/>
+                </a:rPr>
+                <a:t>fokus</a:t>
+              </a:r>
+              <a:r>
+                <a:rPr kumimoji="0" lang="en-US" altLang="en-US" sz="1400" i="0" u="none" strike="noStrike" cap="none" normalizeH="0" baseline="0" dirty="0">
+                  <a:ln>
+                    <a:noFill/>
+                  </a:ln>
+                  <a:solidFill>
+                    <a:schemeClr val="tx1"/>
+                  </a:solidFill>
+                  <a:effectLst/>
+                  <a:latin typeface="Plus Jakarta Sans"/>
+                </a:rPr>
+                <a:t> </a:t>
+              </a:r>
+              <a:r>
+                <a:rPr kumimoji="0" lang="en-US" altLang="en-US" sz="1400" i="0" u="none" strike="noStrike" cap="none" normalizeH="0" baseline="0" dirty="0" err="1">
+                  <a:ln>
+                    <a:noFill/>
+                  </a:ln>
+                  <a:solidFill>
+                    <a:schemeClr val="tx1"/>
+                  </a:solidFill>
+                  <a:effectLst/>
+                  <a:latin typeface="Plus Jakarta Sans"/>
+                </a:rPr>
+                <a:t>memprioritaskan</a:t>
+              </a:r>
+              <a:r>
+                <a:rPr kumimoji="0" lang="en-US" altLang="en-US" sz="1400" i="0" u="none" strike="noStrike" cap="none" normalizeH="0" baseline="0" dirty="0">
+                  <a:ln>
+                    <a:noFill/>
+                  </a:ln>
+                  <a:solidFill>
+                    <a:schemeClr val="tx1"/>
+                  </a:solidFill>
+                  <a:effectLst/>
+                  <a:latin typeface="Plus Jakarta Sans"/>
+                </a:rPr>
+                <a:t> </a:t>
+              </a:r>
+              <a:r>
+                <a:rPr kumimoji="0" lang="en-US" altLang="en-US" sz="1400" i="0" u="none" strike="noStrike" cap="none" normalizeH="0" baseline="0" dirty="0" err="1">
+                  <a:ln>
+                    <a:noFill/>
+                  </a:ln>
+                  <a:solidFill>
+                    <a:schemeClr val="tx1"/>
+                  </a:solidFill>
+                  <a:effectLst/>
+                  <a:latin typeface="Plus Jakarta Sans"/>
+                </a:rPr>
+                <a:t>pemulihan</a:t>
+              </a:r>
+              <a:r>
+                <a:rPr kumimoji="0" lang="en-US" altLang="en-US" sz="1400" i="0" u="none" strike="noStrike" cap="none" normalizeH="0" baseline="0" dirty="0">
+                  <a:ln>
+                    <a:noFill/>
+                  </a:ln>
+                  <a:solidFill>
+                    <a:schemeClr val="tx1"/>
+                  </a:solidFill>
+                  <a:effectLst/>
+                  <a:latin typeface="Plus Jakarta Sans"/>
+                </a:rPr>
+                <a:t> </a:t>
+              </a:r>
+              <a:r>
+                <a:rPr kumimoji="0" lang="en-US" altLang="en-US" sz="1400" i="0" u="none" strike="noStrike" cap="none" normalizeH="0" baseline="0" dirty="0" err="1">
+                  <a:ln>
+                    <a:noFill/>
+                  </a:ln>
+                  <a:solidFill>
+                    <a:schemeClr val="tx1"/>
+                  </a:solidFill>
+                  <a:effectLst/>
+                  <a:latin typeface="Plus Jakarta Sans"/>
+                </a:rPr>
+                <a:t>transmisi</a:t>
+              </a:r>
+              <a:r>
+                <a:rPr kumimoji="0" lang="en-US" altLang="en-US" sz="1400" i="0" u="none" strike="noStrike" cap="none" normalizeH="0" baseline="0" dirty="0">
+                  <a:ln>
+                    <a:noFill/>
+                  </a:ln>
+                  <a:solidFill>
+                    <a:schemeClr val="tx1"/>
+                  </a:solidFill>
+                  <a:effectLst/>
+                  <a:latin typeface="Plus Jakarta Sans"/>
+                </a:rPr>
+                <a:t> dan </a:t>
+              </a:r>
+              <a:r>
+                <a:rPr kumimoji="0" lang="en-US" altLang="en-US" sz="1400" i="0" u="none" strike="noStrike" cap="none" normalizeH="0" baseline="0" dirty="0" err="1">
+                  <a:ln>
+                    <a:noFill/>
+                  </a:ln>
+                  <a:solidFill>
+                    <a:schemeClr val="tx1"/>
+                  </a:solidFill>
+                  <a:effectLst/>
+                  <a:latin typeface="Plus Jakarta Sans"/>
+                </a:rPr>
+                <a:t>catu</a:t>
+              </a:r>
+              <a:r>
+                <a:rPr kumimoji="0" lang="en-US" altLang="en-US" sz="1400" i="0" u="none" strike="noStrike" cap="none" normalizeH="0" baseline="0" dirty="0">
+                  <a:ln>
+                    <a:noFill/>
+                  </a:ln>
+                  <a:solidFill>
+                    <a:schemeClr val="tx1"/>
+                  </a:solidFill>
+                  <a:effectLst/>
+                  <a:latin typeface="Plus Jakarta Sans"/>
+                </a:rPr>
+                <a:t> </a:t>
+              </a:r>
+              <a:r>
+                <a:rPr kumimoji="0" lang="en-US" altLang="en-US" sz="1400" i="0" u="none" strike="noStrike" cap="none" normalizeH="0" baseline="0" dirty="0" err="1">
+                  <a:ln>
+                    <a:noFill/>
+                  </a:ln>
+                  <a:solidFill>
+                    <a:schemeClr val="tx1"/>
+                  </a:solidFill>
+                  <a:effectLst/>
+                  <a:latin typeface="Plus Jakarta Sans"/>
+                </a:rPr>
+                <a:t>daya</a:t>
+              </a:r>
+              <a:r>
+                <a:rPr kumimoji="0" lang="en-US" altLang="en-US" sz="1400" i="0" u="none" strike="noStrike" cap="none" normalizeH="0" baseline="0" dirty="0">
+                  <a:ln>
+                    <a:noFill/>
+                  </a:ln>
+                  <a:solidFill>
+                    <a:schemeClr val="tx1"/>
+                  </a:solidFill>
+                  <a:effectLst/>
+                  <a:latin typeface="Plus Jakarta Sans"/>
+                </a:rPr>
+                <a:t> pada </a:t>
+              </a:r>
+              <a:r>
+                <a:rPr kumimoji="0" lang="en-US" altLang="en-US" sz="1400" i="0" u="none" strike="noStrike" cap="none" normalizeH="0" baseline="0" dirty="0" err="1">
+                  <a:ln>
+                    <a:noFill/>
+                  </a:ln>
+                  <a:solidFill>
+                    <a:schemeClr val="tx1"/>
+                  </a:solidFill>
+                  <a:effectLst/>
+                  <a:latin typeface="Plus Jakarta Sans"/>
+                </a:rPr>
+                <a:t>desa-desa</a:t>
+              </a:r>
+              <a:r>
+                <a:rPr kumimoji="0" lang="en-US" altLang="en-US" sz="1400" i="0" u="none" strike="noStrike" cap="none" normalizeH="0" baseline="0" dirty="0">
+                  <a:ln>
+                    <a:noFill/>
+                  </a:ln>
+                  <a:solidFill>
+                    <a:schemeClr val="tx1"/>
+                  </a:solidFill>
+                  <a:effectLst/>
+                  <a:latin typeface="Plus Jakarta Sans"/>
+                </a:rPr>
+                <a:t> </a:t>
+              </a:r>
+              <a:r>
+                <a:rPr kumimoji="0" lang="en-US" altLang="en-US" sz="1400" i="0" u="none" strike="noStrike" cap="none" normalizeH="0" baseline="0" dirty="0" err="1">
+                  <a:ln>
+                    <a:noFill/>
+                  </a:ln>
+                  <a:solidFill>
+                    <a:schemeClr val="tx1"/>
+                  </a:solidFill>
+                  <a:effectLst/>
+                  <a:latin typeface="Plus Jakarta Sans"/>
+                </a:rPr>
+                <a:t>terdampak</a:t>
+              </a:r>
+              <a:r>
+                <a:rPr kumimoji="0" lang="en-US" altLang="en-US" sz="1400" i="0" u="none" strike="noStrike" cap="none" normalizeH="0" baseline="0" dirty="0">
+                  <a:ln>
+                    <a:noFill/>
+                  </a:ln>
+                  <a:solidFill>
+                    <a:schemeClr val="tx1"/>
+                  </a:solidFill>
+                  <a:effectLst/>
+                  <a:latin typeface="Plus Jakarta Sans"/>
+                </a:rPr>
+                <a:t> di wilayah </a:t>
+              </a:r>
+              <a:r>
+                <a:rPr kumimoji="0" lang="en-US" altLang="en-US" sz="1400" i="0" u="none" strike="noStrike" cap="none" normalizeH="0" baseline="0" dirty="0" err="1">
+                  <a:ln>
+                    <a:noFill/>
+                  </a:ln>
+                  <a:solidFill>
+                    <a:schemeClr val="tx1"/>
+                  </a:solidFill>
+                  <a:effectLst/>
+                  <a:latin typeface="Plus Jakarta Sans"/>
+                </a:rPr>
+                <a:t>Kabupaten</a:t>
+              </a:r>
+              <a:r>
+                <a:rPr kumimoji="0" lang="en-US" altLang="en-US" sz="1400" i="0" u="none" strike="noStrike" cap="none" normalizeH="0" baseline="0" dirty="0">
+                  <a:ln>
+                    <a:noFill/>
+                  </a:ln>
+                  <a:solidFill>
+                    <a:schemeClr val="tx1"/>
+                  </a:solidFill>
+                  <a:effectLst/>
+                  <a:latin typeface="Plus Jakarta Sans"/>
+                </a:rPr>
+                <a:t> {{</a:t>
+              </a:r>
+              <a:r>
+                <a:rPr kumimoji="0" lang="en-US" altLang="en-US" sz="1400" i="0" u="none" strike="noStrike" cap="none" normalizeH="0" baseline="0" dirty="0" err="1">
+                  <a:ln>
+                    <a:noFill/>
+                  </a:ln>
+                  <a:solidFill>
+                    <a:schemeClr val="tx1"/>
+                  </a:solidFill>
+                  <a:effectLst/>
+                  <a:latin typeface="Plus Jakarta Sans"/>
+                </a:rPr>
+                <a:t>top_kab_down</a:t>
+              </a:r>
+              <a:r>
+                <a:rPr kumimoji="0" lang="en-US" altLang="en-US" sz="1400" i="0" u="none" strike="noStrike" cap="none" normalizeH="0" baseline="0" dirty="0">
+                  <a:ln>
+                    <a:noFill/>
+                  </a:ln>
+                  <a:solidFill>
+                    <a:schemeClr val="tx1"/>
+                  </a:solidFill>
+                  <a:effectLst/>
+                  <a:latin typeface="Plus Jakarta Sans"/>
+                </a:rPr>
+                <a:t>}}.</a:t>
+              </a:r>
+            </a:p>
+            <a:p>
+              <a:pPr algn="just"/>
+              <a:endParaRPr sz="1400" dirty="0">
+                <a:latin typeface="Plus Jakarta Sans"/>
+              </a:endParaRPr>
+            </a:p>
+          </p:txBody>
+        </p:sp>
+        <p:sp>
+          <p:nvSpPr>
+            <p:cNvPr id="10" name="TextBox 9">
+              <a:extLst>
+                <a:ext uri="{FF2B5EF4-FFF2-40B4-BE49-F238E27FC236}">
+                  <a16:creationId xmlns:a16="http://schemas.microsoft.com/office/drawing/2014/main" id="{321770D5-E2A4-4E96-B938-0CB2D3464253}"/>
+                </a:ext>
+              </a:extLst>
+            </p:cNvPr>
+            <p:cNvSpPr txBox="1"/>
+            <p:nvPr/>
+          </p:nvSpPr>
+          <p:spPr>
+            <a:xfrm>
+              <a:off x="8105676" y="6526587"/>
+              <a:ext cx="5627492" cy="103232"/>
+            </a:xfrm>
+            <a:prstGeom prst="rect">
+              <a:avLst/>
+            </a:prstGeom>
+            <a:noFill/>
+          </p:spPr>
+          <p:txBody>
+            <a:bodyPr wrap="square" lIns="247650" tIns="0" rIns="0" bIns="0" anchor="t">
+              <a:spAutoFit/>
+            </a:bodyPr>
+            <a:lstStyle/>
+            <a:p>
+              <a:pPr algn="l"/>
+              <a:r>
+                <a:rPr lang="en-US" sz="1400" b="1" dirty="0">
+                  <a:latin typeface="Plus Jakarta Sans"/>
+                </a:rPr>
+                <a:t>RINGKASAN EKSEKUTIF &amp; SITUASI OPERASIONAL:</a:t>
+              </a:r>
+              <a:endParaRPr sz="1350" b="1" i="0" u="none" dirty="0">
+                <a:solidFill>
+                  <a:srgbClr val="0F172A"/>
+                </a:solidFill>
+                <a:latin typeface="Plus Jakarta Sans"/>
+              </a:endParaRPr>
+            </a:p>
+          </p:txBody>
+        </p:sp>
+        <p:sp>
+          <p:nvSpPr>
+            <p:cNvPr id="12" name="TextBox 11">
+              <a:extLst>
+                <a:ext uri="{FF2B5EF4-FFF2-40B4-BE49-F238E27FC236}">
+                  <a16:creationId xmlns:a16="http://schemas.microsoft.com/office/drawing/2014/main" id="{FF5C7A8C-0673-4BD4-AC71-164B80287FF7}"/>
+                </a:ext>
+              </a:extLst>
+            </p:cNvPr>
+            <p:cNvSpPr txBox="1"/>
+            <p:nvPr/>
+          </p:nvSpPr>
+          <p:spPr>
+            <a:xfrm>
+              <a:off x="8000331" y="6861545"/>
+              <a:ext cx="5818562" cy="81110"/>
+            </a:xfrm>
+            <a:prstGeom prst="rect">
+              <a:avLst/>
+            </a:prstGeom>
+            <a:noFill/>
+          </p:spPr>
+          <p:txBody>
+            <a:bodyPr wrap="square" lIns="0" tIns="0" rIns="0" bIns="0" anchor="t">
+              <a:spAutoFit/>
+            </a:bodyPr>
+            <a:lstStyle/>
+            <a:p>
+              <a:pPr algn="just"/>
+              <a:endParaRPr lang="en-US" sz="1100" dirty="0"/>
+            </a:p>
+          </p:txBody>
+        </p:sp>
+        <p:pic>
+          <p:nvPicPr>
+            <p:cNvPr id="13" name="Picture 12" descr="image.png">
+              <a:extLst>
+                <a:ext uri="{FF2B5EF4-FFF2-40B4-BE49-F238E27FC236}">
+                  <a16:creationId xmlns:a16="http://schemas.microsoft.com/office/drawing/2014/main" id="{5B236CE3-4A12-471B-A02D-75D8FF9ECDBD}"/>
+                </a:ext>
+              </a:extLst>
+            </p:cNvPr>
+            <p:cNvPicPr>
+              <a:picLocks noChangeAspect="1"/>
+            </p:cNvPicPr>
+            <p:nvPr/>
+          </p:nvPicPr>
+          <p:blipFill>
+            <a:blip r:embed="rId3"/>
+            <a:stretch>
+              <a:fillRect/>
+            </a:stretch>
+          </p:blipFill>
+          <p:spPr>
+            <a:xfrm>
+              <a:off x="8105676" y="6519237"/>
+              <a:ext cx="225950" cy="121031"/>
+            </a:xfrm>
+            <a:prstGeom prst="rect">
+              <a:avLst/>
+            </a:prstGeom>
+          </p:spPr>
+        </p:pic>
+      </p:grpSp>
+      <p:sp>
+        <p:nvSpPr>
+          <p:cNvPr id="15" name="PH_TABEL">
+            <a:extLst>
+              <a:ext uri="{FF2B5EF4-FFF2-40B4-BE49-F238E27FC236}">
+                <a16:creationId xmlns:a16="http://schemas.microsoft.com/office/drawing/2014/main" id="{573AF431-D8B9-4075-8E83-A57087F0EB89}"/>
+              </a:ext>
+            </a:extLst>
+          </p:cNvPr>
+          <p:cNvSpPr/>
+          <p:nvPr/>
+        </p:nvSpPr>
+        <p:spPr>
+          <a:xfrm>
+            <a:off x="97185" y="655494"/>
+            <a:ext cx="7251674" cy="6116711"/>
+          </a:xfrm>
+          <a:prstGeom prst="rect">
+            <a:avLst/>
+          </a:prstGeom>
+          <a:noFill/>
+          <a:ln>
+            <a:solidFill>
+              <a:schemeClr val="tx1"/>
+            </a:solidFill>
+            <a:prstDash val="dashDot"/>
+          </a:ln>
+        </p:spPr>
+        <p:style>
+          <a:lnRef idx="1">
+            <a:schemeClr val="accent1"/>
+          </a:lnRef>
+          <a:fillRef idx="3">
+            <a:schemeClr val="accent1"/>
+          </a:fillRef>
+          <a:effectRef idx="2">
+            <a:schemeClr val="accent1"/>
+          </a:effectRef>
+          <a:fontRef idx="minor">
+            <a:schemeClr val="lt1"/>
+          </a:fontRef>
+        </p:style>
+        <p:txBody>
+          <a:bodyPr rtlCol="0" anchor="ctr"/>
+          <a:lstStyle/>
+          <a:p>
+            <a:pPr algn="ctr"/>
+            <a:r>
+              <a:rPr lang="en-US" b="1" dirty="0">
+                <a:solidFill>
+                  <a:schemeClr val="tx1"/>
+                </a:solidFill>
+              </a:rPr>
+              <a:t>PH_TABEL</a:t>
+            </a:r>
+          </a:p>
+        </p:txBody>
+      </p:sp>
+    </p:spTree>
+    <p:extLst>
+      <p:ext uri="{BB962C8B-B14F-4D97-AF65-F5344CB8AC3E}">
+        <p14:creationId xmlns:p14="http://schemas.microsoft.com/office/powerpoint/2010/main" val="70107813"/>
       </p:ext>
     </p:extLst>
   </p:cSld>

--- a/template_baku.pptx.pptx
+++ b/template_baku.pptx.pptx
@@ -1472,7 +1472,7 @@
           <a:graphicData uri="http://schemas.openxmlformats.org/presentationml/2006/ole">
             <mc:AlternateContent xmlns:mc="http://schemas.openxmlformats.org/markup-compatibility/2006">
               <mc:Choice xmlns:v="urn:schemas-microsoft-com:vml" Requires="v">
-                <p:oleObj spid="_x0000_s1069" name="think-cell Slide" r:id="rId8" imgW="413" imgH="416" progId="TCLayout.ActiveDocument.1">
+                <p:oleObj spid="_x0000_s1070" name="think-cell Slide" r:id="rId8" imgW="413" imgH="416" progId="TCLayout.ActiveDocument.1">
                   <p:embed/>
                 </p:oleObj>
               </mc:Choice>
@@ -12318,17 +12318,12 @@
               <a:r>
                 <a:rPr lang="en-US" sz="2400" b="1" dirty="0">
                   <a:solidFill>
-                    <a:srgbClr val="FF0000"/>
-                  </a:solidFill>
+                    <a:srgbClr val="0369A1"/>
+                  </a:solidFill>
+                  <a:latin typeface="Plus Jakarta Sans"/>
                 </a:rPr>
                 <a:t>{{4g_down}} Site</a:t>
               </a:r>
-              <a:endParaRPr lang="en-US" sz="2400" b="1" dirty="0">
-                <a:solidFill>
-                  <a:srgbClr val="FF0000"/>
-                </a:solidFill>
-                <a:latin typeface="Plus Jakarta Sans"/>
-              </a:endParaRPr>
             </a:p>
           </p:txBody>
         </p:sp>

--- a/template_baku.pptx.pptx
+++ b/template_baku.pptx.pptx
@@ -17,41 +17,41 @@
   <p:notesSz cx="6858000" cy="9144000"/>
   <p:embeddedFontLst>
     <p:embeddedFont>
-      <p:font typeface="Yu Gothic" panose="020B0400000000000000" pitchFamily="34" charset="-128"/>
+      <p:font typeface="Barlow" panose="00000500000000000000" pitchFamily="2" charset="0"/>
       <p:regular r:id="rId7"/>
       <p:bold r:id="rId8"/>
-    </p:embeddedFont>
-    <p:embeddedFont>
-      <p:font typeface="Barlow" panose="00000500000000000000" pitchFamily="2" charset="0"/>
-      <p:regular r:id="rId9"/>
-      <p:bold r:id="rId10"/>
-      <p:italic r:id="rId11"/>
-      <p:boldItalic r:id="rId12"/>
+      <p:italic r:id="rId9"/>
+      <p:boldItalic r:id="rId10"/>
     </p:embeddedFont>
     <p:embeddedFont>
       <p:font typeface="Calibri" panose="020F0502020204030204" pitchFamily="34" charset="0"/>
-      <p:regular r:id="rId13"/>
-      <p:bold r:id="rId14"/>
-      <p:italic r:id="rId15"/>
-      <p:boldItalic r:id="rId16"/>
+      <p:regular r:id="rId11"/>
+      <p:bold r:id="rId12"/>
+      <p:italic r:id="rId13"/>
+      <p:boldItalic r:id="rId14"/>
     </p:embeddedFont>
     <p:embeddedFont>
       <p:font typeface="Montserrat" panose="00000500000000000000" pitchFamily="2" charset="0"/>
-      <p:regular r:id="rId17"/>
-      <p:bold r:id="rId18"/>
-      <p:italic r:id="rId19"/>
-      <p:boldItalic r:id="rId20"/>
+      <p:regular r:id="rId15"/>
+      <p:bold r:id="rId16"/>
+      <p:italic r:id="rId17"/>
+      <p:boldItalic r:id="rId18"/>
     </p:embeddedFont>
     <p:embeddedFont>
       <p:font typeface="Plus Jakarta Sans"/>
-      <p:italic r:id="rId21"/>
+      <p:italic r:id="rId19"/>
     </p:embeddedFont>
     <p:embeddedFont>
       <p:font typeface="Segoe UI" panose="020B0502040204020203" pitchFamily="34" charset="0"/>
-      <p:regular r:id="rId22"/>
-      <p:bold r:id="rId23"/>
-      <p:italic r:id="rId24"/>
-      <p:boldItalic r:id="rId25"/>
+      <p:regular r:id="rId20"/>
+      <p:bold r:id="rId21"/>
+      <p:italic r:id="rId22"/>
+      <p:boldItalic r:id="rId23"/>
+    </p:embeddedFont>
+    <p:embeddedFont>
+      <p:font typeface="Yu Gothic" panose="020B0400000000000000" pitchFamily="34" charset="-128"/>
+      <p:regular r:id="rId24"/>
+      <p:bold r:id="rId25"/>
     </p:embeddedFont>
   </p:embeddedFontLst>
   <p:defaultTextStyle>
@@ -250,7 +250,7 @@
           <a:p>
             <a:fld id="{E9FF55DB-804C-42BF-85A9-7EC675B140D9}" type="datetimeFigureOut">
               <a:rPr lang="en-US" smtClean="0"/>
-              <a:t>10/8/2026</a:t>
+              <a:t>10/26/2026</a:t>
             </a:fld>
             <a:endParaRPr lang="en-US"/>
           </a:p>
@@ -1017,7 +1017,7 @@
           <a:p>
             <a:fld id="{5BCAD085-E8A6-8845-BD4E-CB4CCA059FC4}" type="datetimeFigureOut">
               <a:rPr lang="en-US" smtClean="0"/>
-              <a:t>10/8/2026</a:t>
+              <a:t>10/26/2026</a:t>
             </a:fld>
             <a:endParaRPr lang="en-US"/>
           </a:p>
@@ -1185,7 +1185,7 @@
           <a:p>
             <a:fld id="{5BCAD085-E8A6-8845-BD4E-CB4CCA059FC4}" type="datetimeFigureOut">
               <a:rPr lang="en-US" smtClean="0"/>
-              <a:t>10/8/2026</a:t>
+              <a:t>10/26/2026</a:t>
             </a:fld>
             <a:endParaRPr lang="en-US"/>
           </a:p>
@@ -1363,7 +1363,7 @@
           <a:p>
             <a:fld id="{5BCAD085-E8A6-8845-BD4E-CB4CCA059FC4}" type="datetimeFigureOut">
               <a:rPr lang="en-US" smtClean="0"/>
-              <a:t>10/8/2026</a:t>
+              <a:t>10/26/2026</a:t>
             </a:fld>
             <a:endParaRPr lang="en-US"/>
           </a:p>
@@ -1472,7 +1472,7 @@
           <a:graphicData uri="http://schemas.openxmlformats.org/presentationml/2006/ole">
             <mc:AlternateContent xmlns:mc="http://schemas.openxmlformats.org/markup-compatibility/2006">
               <mc:Choice xmlns:v="urn:schemas-microsoft-com:vml" Requires="v">
-                <p:oleObj spid="_x0000_s1070" name="think-cell Slide" r:id="rId8" imgW="413" imgH="416" progId="TCLayout.ActiveDocument.1">
+                <p:oleObj spid="_x0000_s1073" name="think-cell Slide" r:id="rId8" imgW="413" imgH="416" progId="TCLayout.ActiveDocument.1">
                   <p:embed/>
                 </p:oleObj>
               </mc:Choice>
@@ -2700,7 +2700,7 @@
           <a:p>
             <a:fld id="{5BCAD085-E8A6-8845-BD4E-CB4CCA059FC4}" type="datetimeFigureOut">
               <a:rPr lang="en-US" smtClean="0"/>
-              <a:t>10/8/2026</a:t>
+              <a:t>10/26/2026</a:t>
             </a:fld>
             <a:endParaRPr lang="en-US"/>
           </a:p>
@@ -2945,7 +2945,7 @@
           <a:p>
             <a:fld id="{5BCAD085-E8A6-8845-BD4E-CB4CCA059FC4}" type="datetimeFigureOut">
               <a:rPr lang="en-US" smtClean="0"/>
-              <a:t>10/8/2026</a:t>
+              <a:t>10/26/2026</a:t>
             </a:fld>
             <a:endParaRPr lang="en-US"/>
           </a:p>
@@ -3230,7 +3230,7 @@
           <a:p>
             <a:fld id="{5BCAD085-E8A6-8845-BD4E-CB4CCA059FC4}" type="datetimeFigureOut">
               <a:rPr lang="en-US" smtClean="0"/>
-              <a:t>10/8/2026</a:t>
+              <a:t>10/26/2026</a:t>
             </a:fld>
             <a:endParaRPr lang="en-US"/>
           </a:p>
@@ -3649,7 +3649,7 @@
           <a:p>
             <a:fld id="{5BCAD085-E8A6-8845-BD4E-CB4CCA059FC4}" type="datetimeFigureOut">
               <a:rPr lang="en-US" smtClean="0"/>
-              <a:t>10/8/2026</a:t>
+              <a:t>10/26/2026</a:t>
             </a:fld>
             <a:endParaRPr lang="en-US"/>
           </a:p>
@@ -3766,7 +3766,7 @@
           <a:p>
             <a:fld id="{5BCAD085-E8A6-8845-BD4E-CB4CCA059FC4}" type="datetimeFigureOut">
               <a:rPr lang="en-US" smtClean="0"/>
-              <a:t>10/8/2026</a:t>
+              <a:t>10/26/2026</a:t>
             </a:fld>
             <a:endParaRPr lang="en-US"/>
           </a:p>
@@ -3861,7 +3861,7 @@
           <a:p>
             <a:fld id="{5BCAD085-E8A6-8845-BD4E-CB4CCA059FC4}" type="datetimeFigureOut">
               <a:rPr lang="en-US" smtClean="0"/>
-              <a:t>10/8/2026</a:t>
+              <a:t>10/26/2026</a:t>
             </a:fld>
             <a:endParaRPr lang="en-US"/>
           </a:p>
@@ -4136,7 +4136,7 @@
           <a:p>
             <a:fld id="{5BCAD085-E8A6-8845-BD4E-CB4CCA059FC4}" type="datetimeFigureOut">
               <a:rPr lang="en-US" smtClean="0"/>
-              <a:t>10/8/2026</a:t>
+              <a:t>10/26/2026</a:t>
             </a:fld>
             <a:endParaRPr lang="en-US"/>
           </a:p>
@@ -4388,7 +4388,7 @@
           <a:p>
             <a:fld id="{5BCAD085-E8A6-8845-BD4E-CB4CCA059FC4}" type="datetimeFigureOut">
               <a:rPr lang="en-US" smtClean="0"/>
-              <a:t>10/8/2026</a:t>
+              <a:t>10/26/2026</a:t>
             </a:fld>
             <a:endParaRPr lang="en-US"/>
           </a:p>
@@ -4599,7 +4599,7 @@
           <a:p>
             <a:fld id="{5BCAD085-E8A6-8845-BD4E-CB4CCA059FC4}" type="datetimeFigureOut">
               <a:rPr lang="en-US" smtClean="0"/>
-              <a:t>10/8/2026</a:t>
+              <a:t>10/26/2026</a:t>
             </a:fld>
             <a:endParaRPr lang="en-US"/>
           </a:p>
@@ -11603,69 +11603,37 @@
             <a:lstStyle/>
             <a:p>
               <a:pPr algn="ctr"/>
-              <a:endParaRPr/>
+              <a:r>
+                <a:rPr lang="en-US" sz="2400" b="1" dirty="0">
+                  <a:solidFill>
+                    <a:srgbClr val="15803D"/>
+                  </a:solidFill>
+                  <a:latin typeface="Plus Jakarta Sans"/>
+                </a:rPr>
+                <a:t>{{</a:t>
+              </a:r>
+              <a:r>
+                <a:rPr lang="en-US" sz="2400" b="1" dirty="0" err="1">
+                  <a:solidFill>
+                    <a:srgbClr val="15803D"/>
+                  </a:solidFill>
+                  <a:latin typeface="Plus Jakarta Sans"/>
+                </a:rPr>
+                <a:t>uso_up</a:t>
+              </a:r>
+              <a:r>
+                <a:rPr lang="en-US" sz="2400" b="1" dirty="0">
+                  <a:solidFill>
+                    <a:srgbClr val="15803D"/>
+                  </a:solidFill>
+                  <a:latin typeface="Plus Jakarta Sans"/>
+                </a:rPr>
+                <a:t>}} Site</a:t>
+              </a:r>
             </a:p>
-          </p:txBody>
-        </p:sp>
-        <p:sp>
-          <p:nvSpPr>
-            <p:cNvPr id="229" name="TextBox 228">
-              <a:extLst>
-                <a:ext uri="{FF2B5EF4-FFF2-40B4-BE49-F238E27FC236}">
-                  <a16:creationId xmlns:a16="http://schemas.microsoft.com/office/drawing/2014/main" id="{705FEB99-9A00-4D4D-A1CC-E9FF8BB089EC}"/>
-                </a:ext>
-              </a:extLst>
-            </p:cNvPr>
-            <p:cNvSpPr txBox="1"/>
-            <p:nvPr/>
-          </p:nvSpPr>
-          <p:spPr>
-            <a:xfrm>
-              <a:off x="10387911" y="2203782"/>
-              <a:ext cx="1383908" cy="369332"/>
-            </a:xfrm>
-            <a:prstGeom prst="rect">
-              <a:avLst/>
-            </a:prstGeom>
-            <a:noFill/>
-          </p:spPr>
-          <p:txBody>
-            <a:bodyPr wrap="square" lIns="0" tIns="0" rIns="0" bIns="0" anchor="t">
-              <a:spAutoFit/>
-            </a:bodyPr>
-            <a:lstStyle/>
             <a:p>
               <a:pPr algn="ctr"/>
-              <a:r>
-                <a:rPr lang="en-US" sz="2400" b="1" dirty="0">
-                  <a:solidFill>
-                    <a:srgbClr val="00B050"/>
-                  </a:solidFill>
-                </a:rPr>
-                <a:t>{{</a:t>
-              </a:r>
-              <a:r>
-                <a:rPr lang="en-US" sz="2400" b="1" dirty="0" err="1">
-                  <a:solidFill>
-                    <a:srgbClr val="00B050"/>
-                  </a:solidFill>
-                </a:rPr>
-                <a:t>uso_up</a:t>
-              </a:r>
-              <a:r>
-                <a:rPr lang="en-US" sz="2400" b="1" dirty="0">
-                  <a:solidFill>
-                    <a:srgbClr val="00B050"/>
-                  </a:solidFill>
-                </a:rPr>
-                <a:t>}}</a:t>
-              </a:r>
-              <a:endParaRPr lang="en-US" sz="2400" b="1" dirty="0">
-                <a:solidFill>
-                  <a:srgbClr val="00B050"/>
-                </a:solidFill>
-                <a:latin typeface="Plus Jakarta Sans"/>
-              </a:endParaRPr>
+              <a:endParaRPr dirty="0"/>
             </a:p>
           </p:txBody>
         </p:sp>
@@ -12300,7 +12268,7 @@
           </p:nvSpPr>
           <p:spPr>
             <a:xfrm>
-              <a:off x="8350112" y="3389305"/>
+              <a:off x="8374158" y="3380075"/>
               <a:ext cx="1180145" cy="738664"/>
             </a:xfrm>
             <a:prstGeom prst="rect">
@@ -12819,269 +12787,6 @@
         </p:pic>
         <p:sp>
           <p:nvSpPr>
-            <p:cNvPr id="254" name="Rounded Rectangle 26">
-              <a:extLst>
-                <a:ext uri="{FF2B5EF4-FFF2-40B4-BE49-F238E27FC236}">
-                  <a16:creationId xmlns:a16="http://schemas.microsoft.com/office/drawing/2014/main" id="{CD7440F4-55B5-4F64-98C6-9D719AF4B11B}"/>
-                </a:ext>
-              </a:extLst>
-            </p:cNvPr>
-            <p:cNvSpPr/>
-            <p:nvPr/>
-          </p:nvSpPr>
-          <p:spPr>
-            <a:xfrm>
-              <a:off x="10520768" y="3427054"/>
-              <a:ext cx="1060450" cy="309668"/>
-            </a:xfrm>
-            <a:prstGeom prst="roundRect">
-              <a:avLst>
-                <a:gd name="adj" fmla="val 25000"/>
-              </a:avLst>
-            </a:prstGeom>
-            <a:solidFill>
-              <a:srgbClr val="FFFF00">
-                <a:alpha val="20000"/>
-              </a:srgbClr>
-            </a:solidFill>
-            <a:ln>
-              <a:noFill/>
-            </a:ln>
-            <a:effectLst/>
-          </p:spPr>
-          <p:style>
-            <a:lnRef idx="1">
-              <a:schemeClr val="accent1"/>
-            </a:lnRef>
-            <a:fillRef idx="3">
-              <a:schemeClr val="accent1"/>
-            </a:fillRef>
-            <a:effectRef idx="2">
-              <a:schemeClr val="accent1"/>
-            </a:effectRef>
-            <a:fontRef idx="minor">
-              <a:schemeClr val="lt1"/>
-            </a:fontRef>
-          </p:style>
-          <p:txBody>
-            <a:bodyPr rtlCol="0" anchor="ctr"/>
-            <a:lstStyle/>
-            <a:p>
-              <a:pPr algn="ctr"/>
-              <a:endParaRPr/>
-            </a:p>
-          </p:txBody>
-        </p:sp>
-        <p:sp>
-          <p:nvSpPr>
-            <p:cNvPr id="255" name="TextBox 254">
-              <a:extLst>
-                <a:ext uri="{FF2B5EF4-FFF2-40B4-BE49-F238E27FC236}">
-                  <a16:creationId xmlns:a16="http://schemas.microsoft.com/office/drawing/2014/main" id="{FBF0BEBF-3A0D-4F5D-B96C-299049D93127}"/>
-                </a:ext>
-              </a:extLst>
-            </p:cNvPr>
-            <p:cNvSpPr txBox="1"/>
-            <p:nvPr/>
-          </p:nvSpPr>
-          <p:spPr>
-            <a:xfrm>
-              <a:off x="10416319" y="3389521"/>
-              <a:ext cx="1165898" cy="738664"/>
-            </a:xfrm>
-            <a:prstGeom prst="rect">
-              <a:avLst/>
-            </a:prstGeom>
-            <a:noFill/>
-          </p:spPr>
-          <p:txBody>
-            <a:bodyPr wrap="square" lIns="0" tIns="0" rIns="0" bIns="0" anchor="t">
-              <a:spAutoFit/>
-            </a:bodyPr>
-            <a:lstStyle/>
-            <a:p>
-              <a:pPr algn="ctr"/>
-              <a:r>
-                <a:rPr lang="en-US" sz="2400" b="1" dirty="0">
-                  <a:solidFill>
-                    <a:schemeClr val="bg1">
-                      <a:lumMod val="50000"/>
-                    </a:schemeClr>
-                  </a:solidFill>
-                </a:rPr>
-                <a:t>{{</a:t>
-              </a:r>
-              <a:r>
-                <a:rPr lang="en-US" sz="2400" b="1" dirty="0" err="1">
-                  <a:solidFill>
-                    <a:schemeClr val="bg1">
-                      <a:lumMod val="50000"/>
-                    </a:schemeClr>
-                  </a:solidFill>
-                </a:rPr>
-                <a:t>unmonitor</a:t>
-              </a:r>
-              <a:r>
-                <a:rPr lang="en-US" sz="2400" b="1" dirty="0">
-                  <a:solidFill>
-                    <a:schemeClr val="bg1">
-                      <a:lumMod val="50000"/>
-                    </a:schemeClr>
-                  </a:solidFill>
-                </a:rPr>
-                <a:t>}}</a:t>
-              </a:r>
-              <a:endParaRPr lang="en-US" sz="2400" b="1" dirty="0">
-                <a:solidFill>
-                  <a:schemeClr val="bg1">
-                    <a:lumMod val="50000"/>
-                  </a:schemeClr>
-                </a:solidFill>
-                <a:latin typeface="Plus Jakarta Sans"/>
-              </a:endParaRPr>
-            </a:p>
-          </p:txBody>
-        </p:sp>
-        <p:sp>
-          <p:nvSpPr>
-            <p:cNvPr id="256" name="TextBox 255">
-              <a:extLst>
-                <a:ext uri="{FF2B5EF4-FFF2-40B4-BE49-F238E27FC236}">
-                  <a16:creationId xmlns:a16="http://schemas.microsoft.com/office/drawing/2014/main" id="{E5AA58FA-43C0-4BA9-B314-A7EF9F0865B7}"/>
-                </a:ext>
-              </a:extLst>
-            </p:cNvPr>
-            <p:cNvSpPr txBox="1"/>
-            <p:nvPr/>
-          </p:nvSpPr>
-          <p:spPr>
-            <a:xfrm>
-              <a:off x="5624430" y="2745812"/>
-              <a:ext cx="1154483" cy="307777"/>
-            </a:xfrm>
-            <a:prstGeom prst="rect">
-              <a:avLst/>
-            </a:prstGeom>
-            <a:noFill/>
-          </p:spPr>
-          <p:txBody>
-            <a:bodyPr wrap="none" rtlCol="0">
-              <a:spAutoFit/>
-            </a:bodyPr>
-            <a:lstStyle/>
-            <a:p>
-              <a:pPr algn="ctr"/>
-              <a:r>
-                <a:rPr lang="en-US" sz="700" i="1" dirty="0"/>
-                <a:t>*</a:t>
-              </a:r>
-              <a:r>
-                <a:rPr lang="en-US" sz="700" i="1" dirty="0" err="1"/>
-                <a:t>tidak</a:t>
-              </a:r>
-              <a:r>
-                <a:rPr lang="en-US" sz="700" i="1" dirty="0"/>
-                <a:t> </a:t>
-              </a:r>
-              <a:r>
-                <a:rPr lang="en-US" sz="700" i="1" dirty="0" err="1"/>
-                <a:t>memperhitungkan</a:t>
-              </a:r>
-              <a:endParaRPr lang="en-US" sz="700" i="1" dirty="0"/>
-            </a:p>
-            <a:p>
-              <a:pPr algn="ctr"/>
-              <a:r>
-                <a:rPr lang="en-US" sz="700" i="1" dirty="0"/>
-                <a:t>raw data USO </a:t>
-              </a:r>
-              <a:r>
-                <a:rPr lang="en-US" sz="700" i="1" dirty="0" err="1"/>
-                <a:t>dari</a:t>
-              </a:r>
-              <a:r>
-                <a:rPr lang="en-US" sz="700" i="1" dirty="0"/>
-                <a:t> </a:t>
-              </a:r>
-              <a:r>
-                <a:rPr lang="en-US" sz="700" i="1" dirty="0" err="1"/>
-                <a:t>Semeru</a:t>
-              </a:r>
-              <a:endParaRPr lang="en-US" sz="700" i="1" dirty="0"/>
-            </a:p>
-          </p:txBody>
-        </p:sp>
-        <p:sp>
-          <p:nvSpPr>
-            <p:cNvPr id="257" name="TextBox 256">
-              <a:extLst>
-                <a:ext uri="{FF2B5EF4-FFF2-40B4-BE49-F238E27FC236}">
-                  <a16:creationId xmlns:a16="http://schemas.microsoft.com/office/drawing/2014/main" id="{D5358119-AA93-45F0-8DB6-A6DBA6DBF3A4}"/>
-                </a:ext>
-              </a:extLst>
-            </p:cNvPr>
-            <p:cNvSpPr txBox="1"/>
-            <p:nvPr/>
-          </p:nvSpPr>
-          <p:spPr>
-            <a:xfrm>
-              <a:off x="5721418" y="3982889"/>
-              <a:ext cx="1154483" cy="307777"/>
-            </a:xfrm>
-            <a:prstGeom prst="rect">
-              <a:avLst/>
-            </a:prstGeom>
-            <a:noFill/>
-          </p:spPr>
-          <p:txBody>
-            <a:bodyPr wrap="none" rtlCol="0">
-              <a:spAutoFit/>
-            </a:bodyPr>
-            <a:lstStyle/>
-            <a:p>
-              <a:pPr algn="ctr"/>
-              <a:r>
-                <a:rPr lang="en-US" sz="700" i="1" dirty="0"/>
-                <a:t>*</a:t>
-              </a:r>
-              <a:r>
-                <a:rPr lang="en-US" sz="700" i="1" dirty="0" err="1"/>
-                <a:t>tidak</a:t>
-              </a:r>
-              <a:r>
-                <a:rPr lang="en-US" sz="700" i="1" dirty="0"/>
-                <a:t>  </a:t>
-              </a:r>
-              <a:r>
-                <a:rPr lang="en-US" sz="700" i="1" dirty="0" err="1"/>
-                <a:t>memperhitungkan</a:t>
-              </a:r>
-              <a:endParaRPr lang="en-US" sz="700" i="1" dirty="0"/>
-            </a:p>
-            <a:p>
-              <a:pPr algn="ctr"/>
-              <a:r>
-                <a:rPr lang="en-US" sz="700" i="1" dirty="0"/>
-                <a:t>raw data USO </a:t>
-              </a:r>
-              <a:r>
-                <a:rPr lang="en-US" sz="700" i="1" dirty="0" err="1"/>
-                <a:t>dari</a:t>
-              </a:r>
-              <a:r>
-                <a:rPr lang="en-US" sz="700" i="1" dirty="0"/>
-                <a:t> </a:t>
-              </a:r>
-              <a:r>
-                <a:rPr lang="en-US" sz="700" i="1" dirty="0" err="1"/>
-                <a:t>Semeru</a:t>
-              </a:r>
-              <a:endParaRPr lang="en-US" sz="700" i="1" dirty="0"/>
-            </a:p>
-          </p:txBody>
-        </p:sp>
-        <p:sp>
-          <p:nvSpPr>
             <p:cNvPr id="258" name="TextBox 257">
               <a:extLst>
                 <a:ext uri="{FF2B5EF4-FFF2-40B4-BE49-F238E27FC236}">
@@ -13145,6 +12850,87 @@
           </p:txBody>
         </p:sp>
       </p:grpSp>
+      <p:sp>
+        <p:nvSpPr>
+          <p:cNvPr id="122" name="Rounded Rectangle 26">
+            <a:extLst>
+              <a:ext uri="{FF2B5EF4-FFF2-40B4-BE49-F238E27FC236}">
+                <a16:creationId xmlns:a16="http://schemas.microsoft.com/office/drawing/2014/main" id="{18910720-40AE-4126-ACDC-5C679820C2ED}"/>
+              </a:ext>
+            </a:extLst>
+          </p:cNvPr>
+          <p:cNvSpPr/>
+          <p:nvPr/>
+        </p:nvSpPr>
+        <p:spPr>
+          <a:xfrm>
+            <a:off x="10583838" y="3351312"/>
+            <a:ext cx="1060450" cy="309668"/>
+          </a:xfrm>
+          <a:prstGeom prst="roundRect">
+            <a:avLst>
+              <a:gd name="adj" fmla="val 25000"/>
+            </a:avLst>
+          </a:prstGeom>
+          <a:solidFill>
+            <a:srgbClr val="FF0000">
+              <a:alpha val="20000"/>
+            </a:srgbClr>
+          </a:solidFill>
+          <a:ln>
+            <a:noFill/>
+          </a:ln>
+          <a:effectLst/>
+        </p:spPr>
+        <p:style>
+          <a:lnRef idx="1">
+            <a:schemeClr val="accent1"/>
+          </a:lnRef>
+          <a:fillRef idx="3">
+            <a:schemeClr val="accent1"/>
+          </a:fillRef>
+          <a:effectRef idx="2">
+            <a:schemeClr val="accent1"/>
+          </a:effectRef>
+          <a:fontRef idx="minor">
+            <a:schemeClr val="lt1"/>
+          </a:fontRef>
+        </p:style>
+        <p:txBody>
+          <a:bodyPr rtlCol="0" anchor="ctr"/>
+          <a:lstStyle/>
+          <a:p>
+            <a:pPr algn="ctr"/>
+            <a:r>
+              <a:rPr lang="en-US" sz="2400" b="1" dirty="0">
+                <a:solidFill>
+                  <a:srgbClr val="15803D"/>
+                </a:solidFill>
+                <a:latin typeface="Plus Jakarta Sans"/>
+              </a:rPr>
+              <a:t>{{</a:t>
+            </a:r>
+            <a:r>
+              <a:rPr lang="en-US" sz="2400" b="1" dirty="0" err="1">
+                <a:solidFill>
+                  <a:srgbClr val="15803D"/>
+                </a:solidFill>
+                <a:latin typeface="Plus Jakarta Sans"/>
+              </a:rPr>
+              <a:t>uso_down</a:t>
+            </a:r>
+            <a:r>
+              <a:rPr lang="en-US" sz="2400" b="1" dirty="0">
+                <a:solidFill>
+                  <a:srgbClr val="15803D"/>
+                </a:solidFill>
+                <a:latin typeface="Plus Jakarta Sans"/>
+              </a:rPr>
+              <a:t>}} Site</a:t>
+            </a:r>
+          </a:p>
+        </p:txBody>
+      </p:sp>
     </p:spTree>
     <p:extLst>
       <p:ext uri="{BB962C8B-B14F-4D97-AF65-F5344CB8AC3E}">
@@ -13427,6 +13213,7 @@
             </a:bodyPr>
             <a:lstStyle/>
             <a:p>
+              <a:pPr algn="just"/>
               <a:r>
                 <a:rPr lang="en-US" sz="1100" dirty="0" err="1"/>
                 <a:t>Berdasarkan</a:t>
@@ -13505,7 +13292,31 @@
               </a:r>
               <a:r>
                 <a:rPr lang="en-US" sz="1100" dirty="0"/>
-                <a:t> pada September 2026 </a:t>
+                <a:t> pada </a:t>
+              </a:r>
+              <a:r>
+                <a:rPr lang="en-US" sz="1100" dirty="0">
+                  <a:solidFill>
+                    <a:schemeClr val="tx1"/>
+                  </a:solidFill>
+                </a:rPr>
+                <a:t>{{</a:t>
+              </a:r>
+              <a:r>
+                <a:rPr lang="en-US" sz="1100" dirty="0" err="1">
+                  <a:solidFill>
+                    <a:schemeClr val="tx1"/>
+                  </a:solidFill>
+                </a:rPr>
+                <a:t>waktu_kejadian</a:t>
+              </a:r>
+              <a:r>
+                <a:rPr lang="en-US" sz="1100" dirty="0">
+                  <a:solidFill>
+                    <a:schemeClr val="tx1"/>
+                  </a:solidFill>
+                </a:rPr>
+                <a:t>}} </a:t>
               </a:r>
               <a:r>
                 <a:rPr lang="en-US" sz="1100" dirty="0" err="1"/>
@@ -13565,7 +13376,7 @@
               </a:r>
             </a:p>
             <a:p>
-              <a:pPr marL="228600" indent="-228600">
+              <a:pPr marL="228600" indent="-228600" algn="just">
                 <a:buAutoNum type="arabicPeriod"/>
               </a:pPr>
               <a:r>
@@ -13590,6 +13401,7 @@
               </a:r>
             </a:p>
             <a:p>
+              <a:pPr algn="just"/>
               <a:r>
                 <a:rPr lang="en-US" sz="1100" dirty="0" err="1"/>
                 <a:t>Terdapat</a:t>
@@ -13760,6 +13572,7 @@
               </a:r>
             </a:p>
             <a:p>
+              <a:pPr algn="just"/>
               <a:r>
                 <a:rPr lang="en-US" sz="1100" b="1" dirty="0"/>
                 <a:t>2. </a:t>
@@ -13774,6 +13587,7 @@
               </a:r>
             </a:p>
             <a:p>
+              <a:pPr algn="just"/>
               <a:r>
                 <a:rPr lang="en-US" sz="1100" dirty="0" err="1"/>
                 <a:t>Gangguan</a:t>
@@ -13872,6 +13686,7 @@
               </a:r>
             </a:p>
             <a:p>
+              <a:pPr algn="just"/>
               <a:r>
                 <a:rPr lang="en-US" sz="1100" b="1" dirty="0"/>
                 <a:t>3. </a:t>
@@ -13894,6 +13709,7 @@
               </a:r>
             </a:p>
             <a:p>
+              <a:pPr algn="just"/>
               <a:r>
                 <a:rPr lang="en-US" sz="1100" dirty="0" err="1"/>
                 <a:t>Meski</a:t>
@@ -14024,6 +13840,7 @@
               </a:r>
             </a:p>
             <a:p>
+              <a:pPr algn="just"/>
               <a:endParaRPr lang="en-US" sz="1100" dirty="0" err="1"/>
             </a:p>
           </p:txBody>

--- a/template_baku.pptx.pptx
+++ b/template_baku.pptx.pptx
@@ -1472,7 +1472,7 @@
           <a:graphicData uri="http://schemas.openxmlformats.org/presentationml/2006/ole">
             <mc:AlternateContent xmlns:mc="http://schemas.openxmlformats.org/markup-compatibility/2006">
               <mc:Choice xmlns:v="urn:schemas-microsoft-com:vml" Requires="v">
-                <p:oleObj spid="_x0000_s1073" name="think-cell Slide" r:id="rId8" imgW="413" imgH="416" progId="TCLayout.ActiveDocument.1">
+                <p:oleObj spid="_x0000_s1074" name="think-cell Slide" r:id="rId8" imgW="413" imgH="416" progId="TCLayout.ActiveDocument.1">
                   <p:embed/>
                 </p:oleObj>
               </mc:Choice>
@@ -11568,8 +11568,8 @@
           </p:nvSpPr>
           <p:spPr>
             <a:xfrm>
-              <a:off x="10521767" y="2255544"/>
-              <a:ext cx="1060450" cy="306140"/>
+              <a:off x="10521766" y="2255544"/>
+              <a:ext cx="1098877" cy="306140"/>
             </a:xfrm>
             <a:prstGeom prst="roundRect">
               <a:avLst>
@@ -11604,7 +11604,7 @@
             <a:p>
               <a:pPr algn="ctr"/>
               <a:r>
-                <a:rPr lang="en-US" sz="2400" b="1" dirty="0">
+                <a:rPr lang="en-US" sz="2000" b="1" dirty="0">
                   <a:solidFill>
                     <a:srgbClr val="15803D"/>
                   </a:solidFill>
@@ -11613,7 +11613,7 @@
                 <a:t>{{</a:t>
               </a:r>
               <a:r>
-                <a:rPr lang="en-US" sz="2400" b="1" dirty="0" err="1">
+                <a:rPr lang="en-US" sz="2000" b="1" dirty="0" err="1">
                   <a:solidFill>
                     <a:srgbClr val="15803D"/>
                   </a:solidFill>
@@ -11622,7 +11622,7 @@
                 <a:t>uso_up</a:t>
               </a:r>
               <a:r>
-                <a:rPr lang="en-US" sz="2400" b="1" dirty="0">
+                <a:rPr lang="en-US" sz="2000" b="1" dirty="0">
                   <a:solidFill>
                     <a:srgbClr val="15803D"/>
                   </a:solidFill>
@@ -11633,7 +11633,7 @@
             </a:p>
             <a:p>
               <a:pPr algn="ctr"/>
-              <a:endParaRPr dirty="0"/>
+              <a:endParaRPr sz="1600" dirty="0"/>
             </a:p>
           </p:txBody>
         </p:sp>

--- a/template_baku.pptx.pptx
+++ b/template_baku.pptx.pptx
@@ -250,7 +250,7 @@
           <a:p>
             <a:fld id="{E9FF55DB-804C-42BF-85A9-7EC675B140D9}" type="datetimeFigureOut">
               <a:rPr lang="en-US" smtClean="0"/>
-              <a:t>10/26/2026</a:t>
+              <a:t>10/28/2026</a:t>
             </a:fld>
             <a:endParaRPr lang="en-US"/>
           </a:p>
@@ -1017,7 +1017,7 @@
           <a:p>
             <a:fld id="{5BCAD085-E8A6-8845-BD4E-CB4CCA059FC4}" type="datetimeFigureOut">
               <a:rPr lang="en-US" smtClean="0"/>
-              <a:t>10/26/2026</a:t>
+              <a:t>10/28/2026</a:t>
             </a:fld>
             <a:endParaRPr lang="en-US"/>
           </a:p>
@@ -1185,7 +1185,7 @@
           <a:p>
             <a:fld id="{5BCAD085-E8A6-8845-BD4E-CB4CCA059FC4}" type="datetimeFigureOut">
               <a:rPr lang="en-US" smtClean="0"/>
-              <a:t>10/26/2026</a:t>
+              <a:t>10/28/2026</a:t>
             </a:fld>
             <a:endParaRPr lang="en-US"/>
           </a:p>
@@ -1363,7 +1363,7 @@
           <a:p>
             <a:fld id="{5BCAD085-E8A6-8845-BD4E-CB4CCA059FC4}" type="datetimeFigureOut">
               <a:rPr lang="en-US" smtClean="0"/>
-              <a:t>10/26/2026</a:t>
+              <a:t>10/28/2026</a:t>
             </a:fld>
             <a:endParaRPr lang="en-US"/>
           </a:p>
@@ -1472,7 +1472,7 @@
           <a:graphicData uri="http://schemas.openxmlformats.org/presentationml/2006/ole">
             <mc:AlternateContent xmlns:mc="http://schemas.openxmlformats.org/markup-compatibility/2006">
               <mc:Choice xmlns:v="urn:schemas-microsoft-com:vml" Requires="v">
-                <p:oleObj spid="_x0000_s1074" name="think-cell Slide" r:id="rId8" imgW="413" imgH="416" progId="TCLayout.ActiveDocument.1">
+                <p:oleObj spid="_x0000_s1075" name="think-cell Slide" r:id="rId8" imgW="413" imgH="416" progId="TCLayout.ActiveDocument.1">
                   <p:embed/>
                 </p:oleObj>
               </mc:Choice>
@@ -2700,7 +2700,7 @@
           <a:p>
             <a:fld id="{5BCAD085-E8A6-8845-BD4E-CB4CCA059FC4}" type="datetimeFigureOut">
               <a:rPr lang="en-US" smtClean="0"/>
-              <a:t>10/26/2026</a:t>
+              <a:t>10/28/2026</a:t>
             </a:fld>
             <a:endParaRPr lang="en-US"/>
           </a:p>
@@ -2945,7 +2945,7 @@
           <a:p>
             <a:fld id="{5BCAD085-E8A6-8845-BD4E-CB4CCA059FC4}" type="datetimeFigureOut">
               <a:rPr lang="en-US" smtClean="0"/>
-              <a:t>10/26/2026</a:t>
+              <a:t>10/28/2026</a:t>
             </a:fld>
             <a:endParaRPr lang="en-US"/>
           </a:p>
@@ -3230,7 +3230,7 @@
           <a:p>
             <a:fld id="{5BCAD085-E8A6-8845-BD4E-CB4CCA059FC4}" type="datetimeFigureOut">
               <a:rPr lang="en-US" smtClean="0"/>
-              <a:t>10/26/2026</a:t>
+              <a:t>10/28/2026</a:t>
             </a:fld>
             <a:endParaRPr lang="en-US"/>
           </a:p>
@@ -3649,7 +3649,7 @@
           <a:p>
             <a:fld id="{5BCAD085-E8A6-8845-BD4E-CB4CCA059FC4}" type="datetimeFigureOut">
               <a:rPr lang="en-US" smtClean="0"/>
-              <a:t>10/26/2026</a:t>
+              <a:t>10/28/2026</a:t>
             </a:fld>
             <a:endParaRPr lang="en-US"/>
           </a:p>
@@ -3766,7 +3766,7 @@
           <a:p>
             <a:fld id="{5BCAD085-E8A6-8845-BD4E-CB4CCA059FC4}" type="datetimeFigureOut">
               <a:rPr lang="en-US" smtClean="0"/>
-              <a:t>10/26/2026</a:t>
+              <a:t>10/28/2026</a:t>
             </a:fld>
             <a:endParaRPr lang="en-US"/>
           </a:p>
@@ -3861,7 +3861,7 @@
           <a:p>
             <a:fld id="{5BCAD085-E8A6-8845-BD4E-CB4CCA059FC4}" type="datetimeFigureOut">
               <a:rPr lang="en-US" smtClean="0"/>
-              <a:t>10/26/2026</a:t>
+              <a:t>10/28/2026</a:t>
             </a:fld>
             <a:endParaRPr lang="en-US"/>
           </a:p>
@@ -4136,7 +4136,7 @@
           <a:p>
             <a:fld id="{5BCAD085-E8A6-8845-BD4E-CB4CCA059FC4}" type="datetimeFigureOut">
               <a:rPr lang="en-US" smtClean="0"/>
-              <a:t>10/26/2026</a:t>
+              <a:t>10/28/2026</a:t>
             </a:fld>
             <a:endParaRPr lang="en-US"/>
           </a:p>
@@ -4388,7 +4388,7 @@
           <a:p>
             <a:fld id="{5BCAD085-E8A6-8845-BD4E-CB4CCA059FC4}" type="datetimeFigureOut">
               <a:rPr lang="en-US" smtClean="0"/>
-              <a:t>10/26/2026</a:t>
+              <a:t>10/28/2026</a:t>
             </a:fld>
             <a:endParaRPr lang="en-US"/>
           </a:p>
@@ -4599,7 +4599,7 @@
           <a:p>
             <a:fld id="{5BCAD085-E8A6-8845-BD4E-CB4CCA059FC4}" type="datetimeFigureOut">
               <a:rPr lang="en-US" smtClean="0"/>
-              <a:t>10/26/2026</a:t>
+              <a:t>10/28/2026</a:t>
             </a:fld>
             <a:endParaRPr lang="en-US"/>
           </a:p>
@@ -12418,7 +12418,7 @@
           <p:spPr>
             <a:xfrm>
               <a:off x="10433183" y="3184697"/>
-              <a:ext cx="1338636" cy="207749"/>
+              <a:ext cx="1181285" cy="207749"/>
             </a:xfrm>
             <a:prstGeom prst="rect">
               <a:avLst/>
@@ -12442,13 +12442,31 @@
                 <a:t>BTS </a:t>
               </a:r>
               <a:r>
-                <a:rPr lang="en-US" sz="1350" b="1" i="0" u="none" dirty="0">
+                <a:rPr lang="en-US" sz="1350" b="1" i="0" u="none">
                   <a:solidFill>
                     <a:srgbClr val="0F172A"/>
                   </a:solidFill>
                   <a:latin typeface="Plus Jakarta Sans"/>
                 </a:rPr>
-                <a:t>USO (No Data)</a:t>
+                <a:t>USO (</a:t>
+              </a:r>
+              <a:r>
+                <a:rPr lang="en-US" sz="1350" b="1">
+                  <a:solidFill>
+                    <a:srgbClr val="0F172A"/>
+                  </a:solidFill>
+                  <a:latin typeface="Plus Jakarta Sans"/>
+                </a:rPr>
+                <a:t>Down</a:t>
+              </a:r>
+              <a:r>
+                <a:rPr lang="en-US" sz="1350" b="1" i="0" u="none">
+                  <a:solidFill>
+                    <a:srgbClr val="0F172A"/>
+                  </a:solidFill>
+                  <a:latin typeface="Plus Jakarta Sans"/>
+                </a:rPr>
+                <a:t>)</a:t>
               </a:r>
               <a:endParaRPr sz="1350" b="1" i="0" u="none" dirty="0">
                 <a:solidFill>

--- a/template_baku.pptx.pptx
+++ b/template_baku.pptx.pptx
@@ -250,7 +250,7 @@
           <a:p>
             <a:fld id="{E9FF55DB-804C-42BF-85A9-7EC675B140D9}" type="datetimeFigureOut">
               <a:rPr lang="en-US" smtClean="0"/>
-              <a:t>10/28/2026</a:t>
+              <a:t>10/29/2026</a:t>
             </a:fld>
             <a:endParaRPr lang="en-US"/>
           </a:p>
@@ -1017,7 +1017,7 @@
           <a:p>
             <a:fld id="{5BCAD085-E8A6-8845-BD4E-CB4CCA059FC4}" type="datetimeFigureOut">
               <a:rPr lang="en-US" smtClean="0"/>
-              <a:t>10/28/2026</a:t>
+              <a:t>10/29/2026</a:t>
             </a:fld>
             <a:endParaRPr lang="en-US"/>
           </a:p>
@@ -1185,7 +1185,7 @@
           <a:p>
             <a:fld id="{5BCAD085-E8A6-8845-BD4E-CB4CCA059FC4}" type="datetimeFigureOut">
               <a:rPr lang="en-US" smtClean="0"/>
-              <a:t>10/28/2026</a:t>
+              <a:t>10/29/2026</a:t>
             </a:fld>
             <a:endParaRPr lang="en-US"/>
           </a:p>
@@ -1363,7 +1363,7 @@
           <a:p>
             <a:fld id="{5BCAD085-E8A6-8845-BD4E-CB4CCA059FC4}" type="datetimeFigureOut">
               <a:rPr lang="en-US" smtClean="0"/>
-              <a:t>10/28/2026</a:t>
+              <a:t>10/29/2026</a:t>
             </a:fld>
             <a:endParaRPr lang="en-US"/>
           </a:p>
@@ -1472,7 +1472,7 @@
           <a:graphicData uri="http://schemas.openxmlformats.org/presentationml/2006/ole">
             <mc:AlternateContent xmlns:mc="http://schemas.openxmlformats.org/markup-compatibility/2006">
               <mc:Choice xmlns:v="urn:schemas-microsoft-com:vml" Requires="v">
-                <p:oleObj spid="_x0000_s1075" name="think-cell Slide" r:id="rId8" imgW="413" imgH="416" progId="TCLayout.ActiveDocument.1">
+                <p:oleObj spid="_x0000_s1076" name="think-cell Slide" r:id="rId8" imgW="413" imgH="416" progId="TCLayout.ActiveDocument.1">
                   <p:embed/>
                 </p:oleObj>
               </mc:Choice>
@@ -2700,7 +2700,7 @@
           <a:p>
             <a:fld id="{5BCAD085-E8A6-8845-BD4E-CB4CCA059FC4}" type="datetimeFigureOut">
               <a:rPr lang="en-US" smtClean="0"/>
-              <a:t>10/28/2026</a:t>
+              <a:t>10/29/2026</a:t>
             </a:fld>
             <a:endParaRPr lang="en-US"/>
           </a:p>
@@ -2945,7 +2945,7 @@
           <a:p>
             <a:fld id="{5BCAD085-E8A6-8845-BD4E-CB4CCA059FC4}" type="datetimeFigureOut">
               <a:rPr lang="en-US" smtClean="0"/>
-              <a:t>10/28/2026</a:t>
+              <a:t>10/29/2026</a:t>
             </a:fld>
             <a:endParaRPr lang="en-US"/>
           </a:p>
@@ -3230,7 +3230,7 @@
           <a:p>
             <a:fld id="{5BCAD085-E8A6-8845-BD4E-CB4CCA059FC4}" type="datetimeFigureOut">
               <a:rPr lang="en-US" smtClean="0"/>
-              <a:t>10/28/2026</a:t>
+              <a:t>10/29/2026</a:t>
             </a:fld>
             <a:endParaRPr lang="en-US"/>
           </a:p>
@@ -3649,7 +3649,7 @@
           <a:p>
             <a:fld id="{5BCAD085-E8A6-8845-BD4E-CB4CCA059FC4}" type="datetimeFigureOut">
               <a:rPr lang="en-US" smtClean="0"/>
-              <a:t>10/28/2026</a:t>
+              <a:t>10/29/2026</a:t>
             </a:fld>
             <a:endParaRPr lang="en-US"/>
           </a:p>
@@ -3766,7 +3766,7 @@
           <a:p>
             <a:fld id="{5BCAD085-E8A6-8845-BD4E-CB4CCA059FC4}" type="datetimeFigureOut">
               <a:rPr lang="en-US" smtClean="0"/>
-              <a:t>10/28/2026</a:t>
+              <a:t>10/29/2026</a:t>
             </a:fld>
             <a:endParaRPr lang="en-US"/>
           </a:p>
@@ -3861,7 +3861,7 @@
           <a:p>
             <a:fld id="{5BCAD085-E8A6-8845-BD4E-CB4CCA059FC4}" type="datetimeFigureOut">
               <a:rPr lang="en-US" smtClean="0"/>
-              <a:t>10/28/2026</a:t>
+              <a:t>10/29/2026</a:t>
             </a:fld>
             <a:endParaRPr lang="en-US"/>
           </a:p>
@@ -4136,7 +4136,7 @@
           <a:p>
             <a:fld id="{5BCAD085-E8A6-8845-BD4E-CB4CCA059FC4}" type="datetimeFigureOut">
               <a:rPr lang="en-US" smtClean="0"/>
-              <a:t>10/28/2026</a:t>
+              <a:t>10/29/2026</a:t>
             </a:fld>
             <a:endParaRPr lang="en-US"/>
           </a:p>
@@ -4388,7 +4388,7 @@
           <a:p>
             <a:fld id="{5BCAD085-E8A6-8845-BD4E-CB4CCA059FC4}" type="datetimeFigureOut">
               <a:rPr lang="en-US" smtClean="0"/>
-              <a:t>10/28/2026</a:t>
+              <a:t>10/29/2026</a:t>
             </a:fld>
             <a:endParaRPr lang="en-US"/>
           </a:p>
@@ -4599,7 +4599,7 @@
           <a:p>
             <a:fld id="{5BCAD085-E8A6-8845-BD4E-CB4CCA059FC4}" type="datetimeFigureOut">
               <a:rPr lang="en-US" smtClean="0"/>
-              <a:t>10/28/2026</a:t>
+              <a:t>10/29/2026</a:t>
             </a:fld>
             <a:endParaRPr lang="en-US"/>
           </a:p>
@@ -11603,37 +11603,46 @@
             <a:lstStyle/>
             <a:p>
               <a:pPr algn="ctr"/>
-              <a:r>
-                <a:rPr lang="en-US" sz="2000" b="1" dirty="0">
-                  <a:solidFill>
-                    <a:srgbClr val="15803D"/>
-                  </a:solidFill>
-                  <a:latin typeface="Plus Jakarta Sans"/>
-                </a:rPr>
-                <a:t>{{</a:t>
-              </a:r>
-              <a:r>
-                <a:rPr lang="en-US" sz="2000" b="1" dirty="0" err="1">
-                  <a:solidFill>
-                    <a:srgbClr val="15803D"/>
-                  </a:solidFill>
-                  <a:latin typeface="Plus Jakarta Sans"/>
-                </a:rPr>
-                <a:t>uso_up</a:t>
-              </a:r>
-              <a:r>
-                <a:rPr lang="en-US" sz="2000" b="1" dirty="0">
-                  <a:solidFill>
-                    <a:srgbClr val="15803D"/>
-                  </a:solidFill>
-                  <a:latin typeface="Plus Jakarta Sans"/>
-                </a:rPr>
-                <a:t>}} Site</a:t>
-              </a:r>
+              <a:endParaRPr lang="en-US" sz="2400" b="1" dirty="0">
+                <a:solidFill>
+                  <a:srgbClr val="15803D"/>
+                </a:solidFill>
+                <a:latin typeface="Plus Jakarta Sans"/>
+              </a:endParaRPr>
             </a:p>
             <a:p>
               <a:pPr algn="ctr"/>
-              <a:endParaRPr sz="1600" dirty="0"/>
+              <a:r>
+                <a:rPr lang="en-US" sz="2400" b="1" dirty="0">
+                  <a:solidFill>
+                    <a:srgbClr val="15803D"/>
+                  </a:solidFill>
+                  <a:latin typeface="Plus Jakarta Sans"/>
+                </a:rPr>
+                <a:t>{{</a:t>
+              </a:r>
+              <a:r>
+                <a:rPr lang="en-US" sz="2400" b="1" dirty="0" err="1">
+                  <a:solidFill>
+                    <a:srgbClr val="15803D"/>
+                  </a:solidFill>
+                  <a:latin typeface="Plus Jakarta Sans"/>
+                </a:rPr>
+                <a:t>uso_up</a:t>
+              </a:r>
+              <a:r>
+                <a:rPr lang="en-US" sz="2400" b="1" dirty="0">
+                  <a:solidFill>
+                    <a:srgbClr val="15803D"/>
+                  </a:solidFill>
+                  <a:latin typeface="Plus Jakarta Sans"/>
+                </a:rPr>
+                <a:t>}} Site</a:t>
+              </a:r>
+            </a:p>
+            <a:p>
+              <a:pPr algn="ctr"/>
+              <a:endParaRPr dirty="0"/>
             </a:p>
           </p:txBody>
         </p:sp>
